--- a/ゲーム科3年/00_前期/オンラインゲームプログラミングⅡ/07_イベント同期.pptx
+++ b/ゲーム科3年/00_前期/オンラインゲームプログラミングⅡ/07_イベント同期.pptx
@@ -7,10 +7,14 @@
   <p:sldIdLst>
     <p:sldId id="256" r:id="rId2"/>
     <p:sldId id="257" r:id="rId3"/>
-    <p:sldId id="258" r:id="rId4"/>
-    <p:sldId id="259" r:id="rId5"/>
-    <p:sldId id="260" r:id="rId6"/>
-    <p:sldId id="261" r:id="rId7"/>
+    <p:sldId id="259" r:id="rId4"/>
+    <p:sldId id="260" r:id="rId5"/>
+    <p:sldId id="261" r:id="rId6"/>
+    <p:sldId id="262" r:id="rId7"/>
+    <p:sldId id="263" r:id="rId8"/>
+    <p:sldId id="264" r:id="rId9"/>
+    <p:sldId id="265" r:id="rId10"/>
+    <p:sldId id="266" r:id="rId11"/>
   </p:sldIdLst>
   <p:sldSz cx="12192000" cy="6858000"/>
   <p:notesSz cx="6858000" cy="9144000"/>
@@ -264,7 +268,7 @@
           <a:p>
             <a:fld id="{E9CC885B-4903-4D54-9A93-00025F12DED9}" type="datetimeFigureOut">
               <a:rPr kumimoji="1" lang="ja-JP" altLang="en-US" smtClean="0"/>
-              <a:t>2026/8/24</a:t>
+              <a:t>2026/8/26</a:t>
             </a:fld>
             <a:endParaRPr kumimoji="1" lang="ja-JP" altLang="en-US"/>
           </a:p>
@@ -494,7 +498,7 @@
           <a:p>
             <a:fld id="{E9CC885B-4903-4D54-9A93-00025F12DED9}" type="datetimeFigureOut">
               <a:rPr kumimoji="1" lang="ja-JP" altLang="en-US" smtClean="0"/>
-              <a:t>2026/8/24</a:t>
+              <a:t>2026/8/26</a:t>
             </a:fld>
             <a:endParaRPr kumimoji="1" lang="ja-JP" altLang="en-US"/>
           </a:p>
@@ -734,7 +738,7 @@
           <a:p>
             <a:fld id="{E9CC885B-4903-4D54-9A93-00025F12DED9}" type="datetimeFigureOut">
               <a:rPr kumimoji="1" lang="ja-JP" altLang="en-US" smtClean="0"/>
-              <a:t>2026/8/24</a:t>
+              <a:t>2026/8/26</a:t>
             </a:fld>
             <a:endParaRPr kumimoji="1" lang="ja-JP" altLang="en-US"/>
           </a:p>
@@ -964,7 +968,7 @@
           <a:p>
             <a:fld id="{E9CC885B-4903-4D54-9A93-00025F12DED9}" type="datetimeFigureOut">
               <a:rPr kumimoji="1" lang="ja-JP" altLang="en-US" smtClean="0"/>
-              <a:t>2026/8/24</a:t>
+              <a:t>2026/8/26</a:t>
             </a:fld>
             <a:endParaRPr kumimoji="1" lang="ja-JP" altLang="en-US"/>
           </a:p>
@@ -1239,7 +1243,7 @@
           <a:p>
             <a:fld id="{E9CC885B-4903-4D54-9A93-00025F12DED9}" type="datetimeFigureOut">
               <a:rPr kumimoji="1" lang="ja-JP" altLang="en-US" smtClean="0"/>
-              <a:t>2026/8/24</a:t>
+              <a:t>2026/8/26</a:t>
             </a:fld>
             <a:endParaRPr kumimoji="1" lang="ja-JP" altLang="en-US"/>
           </a:p>
@@ -1568,7 +1572,7 @@
           <a:p>
             <a:fld id="{E9CC885B-4903-4D54-9A93-00025F12DED9}" type="datetimeFigureOut">
               <a:rPr kumimoji="1" lang="ja-JP" altLang="en-US" smtClean="0"/>
-              <a:t>2026/8/24</a:t>
+              <a:t>2026/8/26</a:t>
             </a:fld>
             <a:endParaRPr kumimoji="1" lang="ja-JP" altLang="en-US"/>
           </a:p>
@@ -2044,7 +2048,7 @@
           <a:p>
             <a:fld id="{E9CC885B-4903-4D54-9A93-00025F12DED9}" type="datetimeFigureOut">
               <a:rPr kumimoji="1" lang="ja-JP" altLang="en-US" smtClean="0"/>
-              <a:t>2026/8/24</a:t>
+              <a:t>2026/8/26</a:t>
             </a:fld>
             <a:endParaRPr kumimoji="1" lang="ja-JP" altLang="en-US"/>
           </a:p>
@@ -2185,7 +2189,7 @@
           <a:p>
             <a:fld id="{E9CC885B-4903-4D54-9A93-00025F12DED9}" type="datetimeFigureOut">
               <a:rPr kumimoji="1" lang="ja-JP" altLang="en-US" smtClean="0"/>
-              <a:t>2026/8/24</a:t>
+              <a:t>2026/8/26</a:t>
             </a:fld>
             <a:endParaRPr kumimoji="1" lang="ja-JP" altLang="en-US"/>
           </a:p>
@@ -2298,7 +2302,7 @@
           <a:p>
             <a:fld id="{E9CC885B-4903-4D54-9A93-00025F12DED9}" type="datetimeFigureOut">
               <a:rPr kumimoji="1" lang="ja-JP" altLang="en-US" smtClean="0"/>
-              <a:t>2026/8/24</a:t>
+              <a:t>2026/8/26</a:t>
             </a:fld>
             <a:endParaRPr kumimoji="1" lang="ja-JP" altLang="en-US"/>
           </a:p>
@@ -2641,7 +2645,7 @@
           <a:p>
             <a:fld id="{E9CC885B-4903-4D54-9A93-00025F12DED9}" type="datetimeFigureOut">
               <a:rPr kumimoji="1" lang="ja-JP" altLang="en-US" smtClean="0"/>
-              <a:t>2026/8/24</a:t>
+              <a:t>2026/8/26</a:t>
             </a:fld>
             <a:endParaRPr kumimoji="1" lang="ja-JP" altLang="en-US"/>
           </a:p>
@@ -2929,7 +2933,7 @@
           <a:p>
             <a:fld id="{E9CC885B-4903-4D54-9A93-00025F12DED9}" type="datetimeFigureOut">
               <a:rPr kumimoji="1" lang="ja-JP" altLang="en-US" smtClean="0"/>
-              <a:t>2026/8/24</a:t>
+              <a:t>2026/8/26</a:t>
             </a:fld>
             <a:endParaRPr kumimoji="1" lang="ja-JP" altLang="en-US"/>
           </a:p>
@@ -3202,7 +3206,7 @@
           <a:p>
             <a:fld id="{E9CC885B-4903-4D54-9A93-00025F12DED9}" type="datetimeFigureOut">
               <a:rPr kumimoji="1" lang="ja-JP" altLang="en-US" smtClean="0"/>
-              <a:t>2026/8/24</a:t>
+              <a:t>2026/8/26</a:t>
             </a:fld>
             <a:endParaRPr kumimoji="1" lang="ja-JP" altLang="en-US"/>
           </a:p>
@@ -3771,6 +3775,297 @@
 </p:sld>
 </file>
 
+<file path=ppt/slides/slide10.xml><?xml version="1.0" encoding="utf-8"?>
+<p:sld xmlns:a="http://schemas.openxmlformats.org/drawingml/2006/main" xmlns:r="http://schemas.openxmlformats.org/officeDocument/2006/relationships" xmlns:p="http://schemas.openxmlformats.org/presentationml/2006/main">
+  <p:cSld>
+    <p:spTree>
+      <p:nvGrpSpPr>
+        <p:cNvPr id="1" name=""/>
+        <p:cNvGrpSpPr/>
+        <p:nvPr/>
+      </p:nvGrpSpPr>
+      <p:grpSpPr>
+        <a:xfrm>
+          <a:off x="0" y="0"/>
+          <a:ext cx="0" cy="0"/>
+          <a:chOff x="0" y="0"/>
+          <a:chExt cx="0" cy="0"/>
+        </a:xfrm>
+      </p:grpSpPr>
+      <p:sp>
+        <p:nvSpPr>
+          <p:cNvPr id="4" name="テキスト ボックス 3">
+            <a:extLst>
+              <a:ext uri="{FF2B5EF4-FFF2-40B4-BE49-F238E27FC236}">
+                <a16:creationId xmlns:a16="http://schemas.microsoft.com/office/drawing/2014/main" id="{5A13BF46-B8C5-48AA-8308-C9ECFF431A18}"/>
+              </a:ext>
+            </a:extLst>
+          </p:cNvPr>
+          <p:cNvSpPr txBox="1"/>
+          <p:nvPr/>
+        </p:nvSpPr>
+        <p:spPr>
+          <a:xfrm>
+            <a:off x="567542" y="491954"/>
+            <a:ext cx="2646878" cy="584775"/>
+          </a:xfrm>
+          <a:prstGeom prst="rect">
+            <a:avLst/>
+          </a:prstGeom>
+          <a:noFill/>
+        </p:spPr>
+        <p:txBody>
+          <a:bodyPr wrap="none" rtlCol="0">
+            <a:spAutoFit/>
+          </a:bodyPr>
+          <a:lstStyle/>
+          <a:p>
+            <a:r>
+              <a:rPr kumimoji="1" lang="ja-JP" altLang="en-US" sz="3200" b="1" u="sng" dirty="0"/>
+              <a:t>イベント同期</a:t>
+            </a:r>
+          </a:p>
+        </p:txBody>
+      </p:sp>
+      <p:sp>
+        <p:nvSpPr>
+          <p:cNvPr id="6" name="テキスト ボックス 5">
+            <a:extLst>
+              <a:ext uri="{FF2B5EF4-FFF2-40B4-BE49-F238E27FC236}">
+                <a16:creationId xmlns:a16="http://schemas.microsoft.com/office/drawing/2014/main" id="{55830AD6-028B-4C4E-80BF-B70DFC1C3A46}"/>
+              </a:ext>
+            </a:extLst>
+          </p:cNvPr>
+          <p:cNvSpPr txBox="1"/>
+          <p:nvPr/>
+        </p:nvSpPr>
+        <p:spPr>
+          <a:xfrm>
+            <a:off x="567542" y="1216429"/>
+            <a:ext cx="9780241" cy="4154984"/>
+          </a:xfrm>
+          <a:prstGeom prst="rect">
+            <a:avLst/>
+          </a:prstGeom>
+          <a:noFill/>
+        </p:spPr>
+        <p:txBody>
+          <a:bodyPr wrap="none" rtlCol="0">
+            <a:spAutoFit/>
+          </a:bodyPr>
+          <a:lstStyle/>
+          <a:p>
+            <a:r>
+              <a:rPr lang="ja-JP" altLang="en-US" sz="2400" dirty="0"/>
+              <a:t>それぞれ以下のような意味となります。</a:t>
+            </a:r>
+            <a:endParaRPr lang="en-US" altLang="ja-JP" sz="2400" dirty="0"/>
+          </a:p>
+          <a:p>
+            <a:endParaRPr lang="en-US" altLang="ja-JP" sz="2400" dirty="0"/>
+          </a:p>
+          <a:p>
+            <a:r>
+              <a:rPr lang="en-US" altLang="ja-JP" sz="2400" b="1" dirty="0" err="1">
+                <a:solidFill>
+                  <a:srgbClr val="7030A0"/>
+                </a:solidFill>
+              </a:rPr>
+              <a:t>StateAuthority</a:t>
+            </a:r>
+            <a:r>
+              <a:rPr lang="en-US" altLang="ja-JP" sz="2400" dirty="0"/>
+              <a:t>	</a:t>
+            </a:r>
+            <a:r>
+              <a:rPr lang="ja-JP" altLang="en-US" sz="2400" dirty="0"/>
+              <a:t>・・・サーバーが実行する</a:t>
+            </a:r>
+            <a:endParaRPr lang="en-US" altLang="ja-JP" sz="2400" dirty="0"/>
+          </a:p>
+          <a:p>
+            <a:r>
+              <a:rPr lang="en-US" altLang="ja-JP" sz="2400" b="1" dirty="0" err="1">
+                <a:solidFill>
+                  <a:srgbClr val="7030A0"/>
+                </a:solidFill>
+              </a:rPr>
+              <a:t>InputAuthority</a:t>
+            </a:r>
+            <a:r>
+              <a:rPr lang="en-US" altLang="ja-JP" sz="2400" dirty="0"/>
+              <a:t>	</a:t>
+            </a:r>
+            <a:r>
+              <a:rPr lang="ja-JP" altLang="en-US" sz="2400" dirty="0"/>
+              <a:t>・・・自分自身だけ実行する</a:t>
+            </a:r>
+            <a:endParaRPr lang="en-US" altLang="ja-JP" sz="2400" dirty="0"/>
+          </a:p>
+          <a:p>
+            <a:r>
+              <a:rPr lang="en-US" altLang="ja-JP" sz="2400" b="1" dirty="0">
+                <a:solidFill>
+                  <a:srgbClr val="7030A0"/>
+                </a:solidFill>
+              </a:rPr>
+              <a:t>Proxies</a:t>
+            </a:r>
+            <a:r>
+              <a:rPr lang="en-US" altLang="ja-JP" sz="2400" dirty="0"/>
+              <a:t>		</a:t>
+            </a:r>
+            <a:r>
+              <a:rPr lang="ja-JP" altLang="en-US" sz="2400" dirty="0"/>
+              <a:t>・・・自分以外のクライアントが実行する</a:t>
+            </a:r>
+            <a:endParaRPr lang="en-US" altLang="ja-JP" sz="2400" dirty="0"/>
+          </a:p>
+          <a:p>
+            <a:r>
+              <a:rPr lang="en-US" altLang="ja-JP" sz="2400" b="1" dirty="0">
+                <a:solidFill>
+                  <a:srgbClr val="7030A0"/>
+                </a:solidFill>
+              </a:rPr>
+              <a:t>All</a:t>
+            </a:r>
+            <a:r>
+              <a:rPr lang="en-US" altLang="ja-JP" sz="2400" dirty="0"/>
+              <a:t>			</a:t>
+            </a:r>
+            <a:r>
+              <a:rPr lang="ja-JP" altLang="en-US" sz="2400" dirty="0"/>
+              <a:t>・・・全員実行する</a:t>
+            </a:r>
+            <a:endParaRPr lang="en-US" altLang="ja-JP" sz="2400" dirty="0"/>
+          </a:p>
+          <a:p>
+            <a:endParaRPr lang="en-US" altLang="ja-JP" sz="2400" dirty="0"/>
+          </a:p>
+          <a:p>
+            <a:r>
+              <a:rPr lang="ja-JP" altLang="en-US" sz="2400" dirty="0"/>
+              <a:t>今回は</a:t>
+            </a:r>
+            <a:r>
+              <a:rPr lang="en-US" altLang="ja-JP" sz="2400" b="1" dirty="0" err="1">
+                <a:solidFill>
+                  <a:srgbClr val="00B050"/>
+                </a:solidFill>
+              </a:rPr>
+              <a:t>RpcTargets</a:t>
+            </a:r>
+            <a:r>
+              <a:rPr lang="en-US" altLang="ja-JP" sz="2400" dirty="0" err="1"/>
+              <a:t>.</a:t>
+            </a:r>
+            <a:r>
+              <a:rPr lang="en-US" altLang="ja-JP" sz="2400" b="1" dirty="0" err="1">
+                <a:solidFill>
+                  <a:srgbClr val="7030A0"/>
+                </a:solidFill>
+              </a:rPr>
+              <a:t>All</a:t>
+            </a:r>
+            <a:r>
+              <a:rPr lang="ja-JP" altLang="en-US" sz="2400" dirty="0"/>
+              <a:t>なので、全員がエフェクトを発生させます。</a:t>
+            </a:r>
+            <a:endParaRPr lang="en-US" altLang="ja-JP" sz="2400" dirty="0"/>
+          </a:p>
+          <a:p>
+            <a:endParaRPr lang="en-US" altLang="ja-JP" sz="2400" dirty="0"/>
+          </a:p>
+          <a:p>
+            <a:r>
+              <a:rPr lang="en-US" altLang="ja-JP" sz="2400" dirty="0"/>
+              <a:t>※</a:t>
+            </a:r>
+            <a:r>
+              <a:rPr lang="ja-JP" altLang="en-US" sz="2400" dirty="0"/>
+              <a:t>サーバーはエフェクトを出さなくて良いので、</a:t>
+            </a:r>
+            <a:endParaRPr lang="en-US" altLang="ja-JP" sz="2400" dirty="0"/>
+          </a:p>
+          <a:p>
+            <a:r>
+              <a:rPr lang="en-US" altLang="ja-JP" sz="2400" b="1" dirty="0" err="1">
+                <a:solidFill>
+                  <a:srgbClr val="00B050"/>
+                </a:solidFill>
+              </a:rPr>
+              <a:t>RpcTargets</a:t>
+            </a:r>
+            <a:r>
+              <a:rPr lang="en-US" altLang="ja-JP" sz="2400" dirty="0"/>
+              <a:t>.</a:t>
+            </a:r>
+            <a:r>
+              <a:rPr lang="en-US" altLang="ja-JP" sz="2400" b="1" dirty="0">
+                <a:solidFill>
+                  <a:srgbClr val="7030A0"/>
+                </a:solidFill>
+              </a:rPr>
+              <a:t> </a:t>
+            </a:r>
+            <a:r>
+              <a:rPr lang="en-US" altLang="ja-JP" sz="2400" b="1" dirty="0" err="1">
+                <a:solidFill>
+                  <a:srgbClr val="7030A0"/>
+                </a:solidFill>
+              </a:rPr>
+              <a:t>InputAuthority</a:t>
+            </a:r>
+            <a:r>
+              <a:rPr lang="en-US" altLang="ja-JP" sz="2400" b="1" dirty="0">
+                <a:solidFill>
+                  <a:srgbClr val="7030A0"/>
+                </a:solidFill>
+              </a:rPr>
+              <a:t> | </a:t>
+            </a:r>
+            <a:r>
+              <a:rPr lang="en-US" altLang="ja-JP" sz="2400" b="1" dirty="0" err="1">
+                <a:solidFill>
+                  <a:srgbClr val="00B050"/>
+                </a:solidFill>
+              </a:rPr>
+              <a:t>RpcTargets</a:t>
+            </a:r>
+            <a:r>
+              <a:rPr lang="en-US" altLang="ja-JP" sz="2400" dirty="0"/>
+              <a:t>.</a:t>
+            </a:r>
+            <a:r>
+              <a:rPr lang="en-US" altLang="ja-JP" sz="2400" b="1" dirty="0">
+                <a:solidFill>
+                  <a:srgbClr val="7030A0"/>
+                </a:solidFill>
+              </a:rPr>
+              <a:t> Proxies </a:t>
+            </a:r>
+            <a:r>
+              <a:rPr lang="ja-JP" altLang="en-US" sz="2400" dirty="0"/>
+              <a:t>でも良いです。</a:t>
+            </a:r>
+            <a:endParaRPr lang="en-US" altLang="ja-JP" sz="2400" dirty="0"/>
+          </a:p>
+        </p:txBody>
+      </p:sp>
+    </p:spTree>
+    <p:extLst>
+      <p:ext uri="{BB962C8B-B14F-4D97-AF65-F5344CB8AC3E}">
+        <p14:creationId xmlns:p14="http://schemas.microsoft.com/office/powerpoint/2010/main" val="3122861717"/>
+      </p:ext>
+    </p:extLst>
+  </p:cSld>
+  <p:clrMapOvr>
+    <a:masterClrMapping/>
+  </p:clrMapOvr>
+</p:sld>
+</file>
+
 <file path=ppt/slides/slide2.xml><?xml version="1.0" encoding="utf-8"?>
 <p:sld xmlns:a="http://schemas.openxmlformats.org/drawingml/2006/main" xmlns:r="http://schemas.openxmlformats.org/officeDocument/2006/relationships" xmlns:p="http://schemas.openxmlformats.org/presentationml/2006/main">
   <p:cSld>
@@ -4007,7 +4302,7 @@
         <p:spPr>
           <a:xfrm>
             <a:off x="567542" y="1216429"/>
-            <a:ext cx="3397084" cy="461665"/>
+            <a:ext cx="3704860" cy="461665"/>
           </a:xfrm>
           <a:prstGeom prst="rect">
             <a:avLst/>
@@ -4030,146 +4325,7 @@
             </a:r>
             <a:r>
               <a:rPr lang="ja-JP" altLang="en-US" sz="2400" dirty="0"/>
-              <a:t>を開きます。</a:t>
-            </a:r>
-            <a:endParaRPr lang="en-US" altLang="ja-JP" sz="2400" dirty="0"/>
-          </a:p>
-        </p:txBody>
-      </p:sp>
-      <p:pic>
-        <p:nvPicPr>
-          <p:cNvPr id="3" name="図 2">
-            <a:extLst>
-              <a:ext uri="{FF2B5EF4-FFF2-40B4-BE49-F238E27FC236}">
-                <a16:creationId xmlns:a16="http://schemas.microsoft.com/office/drawing/2014/main" id="{C2984B91-78B7-47AD-B921-F0D04A3005BD}"/>
-              </a:ext>
-            </a:extLst>
-          </p:cNvPr>
-          <p:cNvPicPr>
-            <a:picLocks noChangeAspect="1"/>
-          </p:cNvPicPr>
-          <p:nvPr/>
-        </p:nvPicPr>
-        <p:blipFill>
-          <a:blip r:embed="rId2"/>
-          <a:stretch>
-            <a:fillRect/>
-          </a:stretch>
-        </p:blipFill>
-        <p:spPr>
-          <a:xfrm>
-            <a:off x="567542" y="1817794"/>
-            <a:ext cx="8906658" cy="4787329"/>
-          </a:xfrm>
-          <a:prstGeom prst="rect">
-            <a:avLst/>
-          </a:prstGeom>
-        </p:spPr>
-      </p:pic>
-    </p:spTree>
-    <p:extLst>
-      <p:ext uri="{BB962C8B-B14F-4D97-AF65-F5344CB8AC3E}">
-        <p14:creationId xmlns:p14="http://schemas.microsoft.com/office/powerpoint/2010/main" val="2944990675"/>
-      </p:ext>
-    </p:extLst>
-  </p:cSld>
-  <p:clrMapOvr>
-    <a:masterClrMapping/>
-  </p:clrMapOvr>
-</p:sld>
-</file>
-
-<file path=ppt/slides/slide4.xml><?xml version="1.0" encoding="utf-8"?>
-<p:sld xmlns:a="http://schemas.openxmlformats.org/drawingml/2006/main" xmlns:r="http://schemas.openxmlformats.org/officeDocument/2006/relationships" xmlns:p="http://schemas.openxmlformats.org/presentationml/2006/main">
-  <p:cSld>
-    <p:spTree>
-      <p:nvGrpSpPr>
-        <p:cNvPr id="1" name=""/>
-        <p:cNvGrpSpPr/>
-        <p:nvPr/>
-      </p:nvGrpSpPr>
-      <p:grpSpPr>
-        <a:xfrm>
-          <a:off x="0" y="0"/>
-          <a:ext cx="0" cy="0"/>
-          <a:chOff x="0" y="0"/>
-          <a:chExt cx="0" cy="0"/>
-        </a:xfrm>
-      </p:grpSpPr>
-      <p:sp>
-        <p:nvSpPr>
-          <p:cNvPr id="4" name="テキスト ボックス 3">
-            <a:extLst>
-              <a:ext uri="{FF2B5EF4-FFF2-40B4-BE49-F238E27FC236}">
-                <a16:creationId xmlns:a16="http://schemas.microsoft.com/office/drawing/2014/main" id="{5A13BF46-B8C5-48AA-8308-C9ECFF431A18}"/>
-              </a:ext>
-            </a:extLst>
-          </p:cNvPr>
-          <p:cNvSpPr txBox="1"/>
-          <p:nvPr/>
-        </p:nvSpPr>
-        <p:spPr>
-          <a:xfrm>
-            <a:off x="567542" y="491954"/>
-            <a:ext cx="2646878" cy="584775"/>
-          </a:xfrm>
-          <a:prstGeom prst="rect">
-            <a:avLst/>
-          </a:prstGeom>
-          <a:noFill/>
-        </p:spPr>
-        <p:txBody>
-          <a:bodyPr wrap="none" rtlCol="0">
-            <a:spAutoFit/>
-          </a:bodyPr>
-          <a:lstStyle/>
-          <a:p>
-            <a:r>
-              <a:rPr kumimoji="1" lang="ja-JP" altLang="en-US" sz="3200" b="1" u="sng" dirty="0"/>
-              <a:t>イベント同期</a:t>
-            </a:r>
-          </a:p>
-        </p:txBody>
-      </p:sp>
-      <p:sp>
-        <p:nvSpPr>
-          <p:cNvPr id="6" name="テキスト ボックス 5">
-            <a:extLst>
-              <a:ext uri="{FF2B5EF4-FFF2-40B4-BE49-F238E27FC236}">
-                <a16:creationId xmlns:a16="http://schemas.microsoft.com/office/drawing/2014/main" id="{55830AD6-028B-4C4E-80BF-B70DFC1C3A46}"/>
-              </a:ext>
-            </a:extLst>
-          </p:cNvPr>
-          <p:cNvSpPr txBox="1"/>
-          <p:nvPr/>
-        </p:nvSpPr>
-        <p:spPr>
-          <a:xfrm>
-            <a:off x="567542" y="1216429"/>
-            <a:ext cx="3397084" cy="461665"/>
-          </a:xfrm>
-          <a:prstGeom prst="rect">
-            <a:avLst/>
-          </a:prstGeom>
-          <a:noFill/>
-        </p:spPr>
-        <p:txBody>
-          <a:bodyPr wrap="none" rtlCol="0">
-            <a:spAutoFit/>
-          </a:bodyPr>
-          <a:lstStyle/>
-          <a:p>
-            <a:r>
-              <a:rPr lang="en-US" altLang="ja-JP" sz="2400" b="1" dirty="0" err="1">
-                <a:solidFill>
-                  <a:srgbClr val="FF0000"/>
-                </a:solidFill>
-              </a:rPr>
-              <a:t>Player.cs</a:t>
-            </a:r>
-            <a:r>
-              <a:rPr lang="ja-JP" altLang="en-US" sz="2400" dirty="0"/>
-              <a:t>を書きます。</a:t>
+              <a:t>を追記します。</a:t>
             </a:r>
             <a:endParaRPr lang="en-US" altLang="ja-JP" sz="2400" dirty="0"/>
           </a:p>
@@ -4218,7 +4374,7 @@
 </p:sld>
 </file>
 
-<file path=ppt/slides/slide5.xml><?xml version="1.0" encoding="utf-8"?>
+<file path=ppt/slides/slide4.xml><?xml version="1.0" encoding="utf-8"?>
 <p:sld xmlns:a="http://schemas.openxmlformats.org/drawingml/2006/main" xmlns:r="http://schemas.openxmlformats.org/officeDocument/2006/relationships" xmlns:p="http://schemas.openxmlformats.org/presentationml/2006/main">
   <p:cSld>
     <p:spTree>
@@ -4409,6 +4565,107 @@
 </p:sld>
 </file>
 
+<file path=ppt/slides/slide5.xml><?xml version="1.0" encoding="utf-8"?>
+<p:sld xmlns:a="http://schemas.openxmlformats.org/drawingml/2006/main" xmlns:r="http://schemas.openxmlformats.org/officeDocument/2006/relationships" xmlns:p="http://schemas.openxmlformats.org/presentationml/2006/main">
+  <p:cSld>
+    <p:spTree>
+      <p:nvGrpSpPr>
+        <p:cNvPr id="1" name=""/>
+        <p:cNvGrpSpPr/>
+        <p:nvPr/>
+      </p:nvGrpSpPr>
+      <p:grpSpPr>
+        <a:xfrm>
+          <a:off x="0" y="0"/>
+          <a:ext cx="0" cy="0"/>
+          <a:chOff x="0" y="0"/>
+          <a:chExt cx="0" cy="0"/>
+        </a:xfrm>
+      </p:grpSpPr>
+      <p:sp>
+        <p:nvSpPr>
+          <p:cNvPr id="4" name="テキスト ボックス 3">
+            <a:extLst>
+              <a:ext uri="{FF2B5EF4-FFF2-40B4-BE49-F238E27FC236}">
+                <a16:creationId xmlns:a16="http://schemas.microsoft.com/office/drawing/2014/main" id="{5A13BF46-B8C5-48AA-8308-C9ECFF431A18}"/>
+              </a:ext>
+            </a:extLst>
+          </p:cNvPr>
+          <p:cNvSpPr txBox="1"/>
+          <p:nvPr/>
+        </p:nvSpPr>
+        <p:spPr>
+          <a:xfrm>
+            <a:off x="567542" y="491954"/>
+            <a:ext cx="2646878" cy="584775"/>
+          </a:xfrm>
+          <a:prstGeom prst="rect">
+            <a:avLst/>
+          </a:prstGeom>
+          <a:noFill/>
+        </p:spPr>
+        <p:txBody>
+          <a:bodyPr wrap="none" rtlCol="0">
+            <a:spAutoFit/>
+          </a:bodyPr>
+          <a:lstStyle/>
+          <a:p>
+            <a:r>
+              <a:rPr kumimoji="1" lang="ja-JP" altLang="en-US" sz="3200" b="1" u="sng" dirty="0"/>
+              <a:t>イベント同期</a:t>
+            </a:r>
+          </a:p>
+        </p:txBody>
+      </p:sp>
+      <p:sp>
+        <p:nvSpPr>
+          <p:cNvPr id="6" name="テキスト ボックス 5">
+            <a:extLst>
+              <a:ext uri="{FF2B5EF4-FFF2-40B4-BE49-F238E27FC236}">
+                <a16:creationId xmlns:a16="http://schemas.microsoft.com/office/drawing/2014/main" id="{55830AD6-028B-4C4E-80BF-B70DFC1C3A46}"/>
+              </a:ext>
+            </a:extLst>
+          </p:cNvPr>
+          <p:cNvSpPr txBox="1"/>
+          <p:nvPr/>
+        </p:nvSpPr>
+        <p:spPr>
+          <a:xfrm>
+            <a:off x="567542" y="1216429"/>
+            <a:ext cx="3262432" cy="461665"/>
+          </a:xfrm>
+          <a:prstGeom prst="rect">
+            <a:avLst/>
+          </a:prstGeom>
+          <a:noFill/>
+        </p:spPr>
+        <p:txBody>
+          <a:bodyPr wrap="none" rtlCol="0">
+            <a:spAutoFit/>
+          </a:bodyPr>
+          <a:lstStyle/>
+          <a:p>
+            <a:r>
+              <a:rPr lang="ja-JP" altLang="en-US" sz="2400" dirty="0"/>
+              <a:t>動作確認しましょう。</a:t>
+            </a:r>
+            <a:endParaRPr lang="en-US" altLang="ja-JP" sz="2400" dirty="0"/>
+          </a:p>
+        </p:txBody>
+      </p:sp>
+    </p:spTree>
+    <p:extLst>
+      <p:ext uri="{BB962C8B-B14F-4D97-AF65-F5344CB8AC3E}">
+        <p14:creationId xmlns:p14="http://schemas.microsoft.com/office/powerpoint/2010/main" val="2339491877"/>
+      </p:ext>
+    </p:extLst>
+  </p:cSld>
+  <p:clrMapOvr>
+    <a:masterClrMapping/>
+  </p:clrMapOvr>
+</p:sld>
+</file>
+
 <file path=ppt/slides/slide6.xml><?xml version="1.0" encoding="utf-8"?>
 <p:sld xmlns:a="http://schemas.openxmlformats.org/drawingml/2006/main" xmlns:r="http://schemas.openxmlformats.org/officeDocument/2006/relationships" xmlns:p="http://schemas.openxmlformats.org/presentationml/2006/main">
   <p:cSld>
@@ -4476,7 +4733,7 @@
         <p:spPr>
           <a:xfrm>
             <a:off x="567542" y="1216429"/>
-            <a:ext cx="3262432" cy="461665"/>
+            <a:ext cx="10649069" cy="830997"/>
           </a:xfrm>
           <a:prstGeom prst="rect">
             <a:avLst/>
@@ -4491,16 +4748,609 @@
           <a:p>
             <a:r>
               <a:rPr lang="ja-JP" altLang="en-US" sz="2400" dirty="0"/>
-              <a:t>動作確認しましょう。</a:t>
+              <a:t>イベント同期には</a:t>
+            </a:r>
+            <a:r>
+              <a:rPr lang="en-US" altLang="ja-JP" sz="2400" dirty="0"/>
+              <a:t>RPC</a:t>
+            </a:r>
+            <a:r>
+              <a:rPr lang="ja-JP" altLang="en-US" sz="2400" dirty="0"/>
+              <a:t>関数を使用します。</a:t>
+            </a:r>
+            <a:r>
+              <a:rPr lang="en-US" altLang="ja-JP" sz="2400" dirty="0"/>
+              <a:t>RPC</a:t>
+            </a:r>
+            <a:r>
+              <a:rPr lang="ja-JP" altLang="en-US" sz="2400" dirty="0"/>
+              <a:t>関数とは、</a:t>
             </a:r>
             <a:endParaRPr lang="en-US" altLang="ja-JP" sz="2400" dirty="0"/>
           </a:p>
-        </p:txBody>
-      </p:sp>
+          <a:p>
+            <a:r>
+              <a:rPr lang="ja-JP" altLang="en-US" sz="2400" b="1" dirty="0">
+                <a:solidFill>
+                  <a:srgbClr val="FF0000"/>
+                </a:solidFill>
+              </a:rPr>
+              <a:t>ネットワーク経由でクライアントやサーバーに関数を呼ばせる仕組み</a:t>
+            </a:r>
+            <a:r>
+              <a:rPr lang="ja-JP" altLang="en-US" sz="2400" dirty="0"/>
+              <a:t>です。</a:t>
+            </a:r>
+            <a:endParaRPr lang="en-US" altLang="ja-JP" sz="2400" dirty="0"/>
+          </a:p>
+        </p:txBody>
+      </p:sp>
+      <p:pic>
+        <p:nvPicPr>
+          <p:cNvPr id="5" name="図 4">
+            <a:extLst>
+              <a:ext uri="{FF2B5EF4-FFF2-40B4-BE49-F238E27FC236}">
+                <a16:creationId xmlns:a16="http://schemas.microsoft.com/office/drawing/2014/main" id="{FCA2C7D9-34F7-41C4-91DA-12AD566886E2}"/>
+              </a:ext>
+            </a:extLst>
+          </p:cNvPr>
+          <p:cNvPicPr>
+            <a:picLocks noChangeAspect="1"/>
+          </p:cNvPicPr>
+          <p:nvPr/>
+        </p:nvPicPr>
+        <p:blipFill>
+          <a:blip r:embed="rId2"/>
+          <a:stretch>
+            <a:fillRect/>
+          </a:stretch>
+        </p:blipFill>
+        <p:spPr>
+          <a:xfrm>
+            <a:off x="567542" y="2187126"/>
+            <a:ext cx="10088383" cy="2619741"/>
+          </a:xfrm>
+          <a:prstGeom prst="rect">
+            <a:avLst/>
+          </a:prstGeom>
+        </p:spPr>
+      </p:pic>
     </p:spTree>
     <p:extLst>
       <p:ext uri="{BB962C8B-B14F-4D97-AF65-F5344CB8AC3E}">
-        <p14:creationId xmlns:p14="http://schemas.microsoft.com/office/powerpoint/2010/main" val="2339491877"/>
+        <p14:creationId xmlns:p14="http://schemas.microsoft.com/office/powerpoint/2010/main" val="28074180"/>
+      </p:ext>
+    </p:extLst>
+  </p:cSld>
+  <p:clrMapOvr>
+    <a:masterClrMapping/>
+  </p:clrMapOvr>
+</p:sld>
+</file>
+
+<file path=ppt/slides/slide7.xml><?xml version="1.0" encoding="utf-8"?>
+<p:sld xmlns:a="http://schemas.openxmlformats.org/drawingml/2006/main" xmlns:r="http://schemas.openxmlformats.org/officeDocument/2006/relationships" xmlns:p="http://schemas.openxmlformats.org/presentationml/2006/main">
+  <p:cSld>
+    <p:spTree>
+      <p:nvGrpSpPr>
+        <p:cNvPr id="1" name=""/>
+        <p:cNvGrpSpPr/>
+        <p:nvPr/>
+      </p:nvGrpSpPr>
+      <p:grpSpPr>
+        <a:xfrm>
+          <a:off x="0" y="0"/>
+          <a:ext cx="0" cy="0"/>
+          <a:chOff x="0" y="0"/>
+          <a:chExt cx="0" cy="0"/>
+        </a:xfrm>
+      </p:grpSpPr>
+      <p:sp>
+        <p:nvSpPr>
+          <p:cNvPr id="4" name="テキスト ボックス 3">
+            <a:extLst>
+              <a:ext uri="{FF2B5EF4-FFF2-40B4-BE49-F238E27FC236}">
+                <a16:creationId xmlns:a16="http://schemas.microsoft.com/office/drawing/2014/main" id="{5A13BF46-B8C5-48AA-8308-C9ECFF431A18}"/>
+              </a:ext>
+            </a:extLst>
+          </p:cNvPr>
+          <p:cNvSpPr txBox="1"/>
+          <p:nvPr/>
+        </p:nvSpPr>
+        <p:spPr>
+          <a:xfrm>
+            <a:off x="567542" y="491954"/>
+            <a:ext cx="2646878" cy="584775"/>
+          </a:xfrm>
+          <a:prstGeom prst="rect">
+            <a:avLst/>
+          </a:prstGeom>
+          <a:noFill/>
+        </p:spPr>
+        <p:txBody>
+          <a:bodyPr wrap="none" rtlCol="0">
+            <a:spAutoFit/>
+          </a:bodyPr>
+          <a:lstStyle/>
+          <a:p>
+            <a:r>
+              <a:rPr kumimoji="1" lang="ja-JP" altLang="en-US" sz="3200" b="1" u="sng" dirty="0"/>
+              <a:t>イベント同期</a:t>
+            </a:r>
+          </a:p>
+        </p:txBody>
+      </p:sp>
+      <p:sp>
+        <p:nvSpPr>
+          <p:cNvPr id="6" name="テキスト ボックス 5">
+            <a:extLst>
+              <a:ext uri="{FF2B5EF4-FFF2-40B4-BE49-F238E27FC236}">
+                <a16:creationId xmlns:a16="http://schemas.microsoft.com/office/drawing/2014/main" id="{55830AD6-028B-4C4E-80BF-B70DFC1C3A46}"/>
+              </a:ext>
+            </a:extLst>
+          </p:cNvPr>
+          <p:cNvSpPr txBox="1"/>
+          <p:nvPr/>
+        </p:nvSpPr>
+        <p:spPr>
+          <a:xfrm>
+            <a:off x="567542" y="1216429"/>
+            <a:ext cx="8125942" cy="461665"/>
+          </a:xfrm>
+          <a:prstGeom prst="rect">
+            <a:avLst/>
+          </a:prstGeom>
+          <a:noFill/>
+        </p:spPr>
+        <p:txBody>
+          <a:bodyPr wrap="none" rtlCol="0">
+            <a:spAutoFit/>
+          </a:bodyPr>
+          <a:lstStyle/>
+          <a:p>
+            <a:r>
+              <a:rPr lang="en-US" altLang="ja-JP" sz="2400" b="1" dirty="0" err="1">
+                <a:solidFill>
+                  <a:srgbClr val="00B050"/>
+                </a:solidFill>
+              </a:rPr>
+              <a:t>RpcSources</a:t>
+            </a:r>
+            <a:r>
+              <a:rPr lang="ja-JP" altLang="en-US" sz="2400" dirty="0"/>
+              <a:t>とは、この関数を呼び出し権限になります。</a:t>
+            </a:r>
+            <a:endParaRPr lang="en-US" altLang="ja-JP" sz="2400" dirty="0"/>
+          </a:p>
+        </p:txBody>
+      </p:sp>
+      <p:pic>
+        <p:nvPicPr>
+          <p:cNvPr id="3" name="図 2">
+            <a:extLst>
+              <a:ext uri="{FF2B5EF4-FFF2-40B4-BE49-F238E27FC236}">
+                <a16:creationId xmlns:a16="http://schemas.microsoft.com/office/drawing/2014/main" id="{8CD2F4E4-AA0E-4B2E-A1FB-62759BDFA72C}"/>
+              </a:ext>
+            </a:extLst>
+          </p:cNvPr>
+          <p:cNvPicPr>
+            <a:picLocks noChangeAspect="1"/>
+          </p:cNvPicPr>
+          <p:nvPr/>
+        </p:nvPicPr>
+        <p:blipFill>
+          <a:blip r:embed="rId2"/>
+          <a:stretch>
+            <a:fillRect/>
+          </a:stretch>
+        </p:blipFill>
+        <p:spPr>
+          <a:xfrm>
+            <a:off x="567542" y="1817794"/>
+            <a:ext cx="7964011" cy="4639322"/>
+          </a:xfrm>
+          <a:prstGeom prst="rect">
+            <a:avLst/>
+          </a:prstGeom>
+        </p:spPr>
+      </p:pic>
+    </p:spTree>
+    <p:extLst>
+      <p:ext uri="{BB962C8B-B14F-4D97-AF65-F5344CB8AC3E}">
+        <p14:creationId xmlns:p14="http://schemas.microsoft.com/office/powerpoint/2010/main" val="2896785357"/>
+      </p:ext>
+    </p:extLst>
+  </p:cSld>
+  <p:clrMapOvr>
+    <a:masterClrMapping/>
+  </p:clrMapOvr>
+</p:sld>
+</file>
+
+<file path=ppt/slides/slide8.xml><?xml version="1.0" encoding="utf-8"?>
+<p:sld xmlns:a="http://schemas.openxmlformats.org/drawingml/2006/main" xmlns:r="http://schemas.openxmlformats.org/officeDocument/2006/relationships" xmlns:p="http://schemas.openxmlformats.org/presentationml/2006/main">
+  <p:cSld>
+    <p:spTree>
+      <p:nvGrpSpPr>
+        <p:cNvPr id="1" name=""/>
+        <p:cNvGrpSpPr/>
+        <p:nvPr/>
+      </p:nvGrpSpPr>
+      <p:grpSpPr>
+        <a:xfrm>
+          <a:off x="0" y="0"/>
+          <a:ext cx="0" cy="0"/>
+          <a:chOff x="0" y="0"/>
+          <a:chExt cx="0" cy="0"/>
+        </a:xfrm>
+      </p:grpSpPr>
+      <p:sp>
+        <p:nvSpPr>
+          <p:cNvPr id="4" name="テキスト ボックス 3">
+            <a:extLst>
+              <a:ext uri="{FF2B5EF4-FFF2-40B4-BE49-F238E27FC236}">
+                <a16:creationId xmlns:a16="http://schemas.microsoft.com/office/drawing/2014/main" id="{5A13BF46-B8C5-48AA-8308-C9ECFF431A18}"/>
+              </a:ext>
+            </a:extLst>
+          </p:cNvPr>
+          <p:cNvSpPr txBox="1"/>
+          <p:nvPr/>
+        </p:nvSpPr>
+        <p:spPr>
+          <a:xfrm>
+            <a:off x="567542" y="491954"/>
+            <a:ext cx="2646878" cy="584775"/>
+          </a:xfrm>
+          <a:prstGeom prst="rect">
+            <a:avLst/>
+          </a:prstGeom>
+          <a:noFill/>
+        </p:spPr>
+        <p:txBody>
+          <a:bodyPr wrap="none" rtlCol="0">
+            <a:spAutoFit/>
+          </a:bodyPr>
+          <a:lstStyle/>
+          <a:p>
+            <a:r>
+              <a:rPr kumimoji="1" lang="ja-JP" altLang="en-US" sz="3200" b="1" u="sng" dirty="0"/>
+              <a:t>イベント同期</a:t>
+            </a:r>
+          </a:p>
+        </p:txBody>
+      </p:sp>
+      <p:sp>
+        <p:nvSpPr>
+          <p:cNvPr id="6" name="テキスト ボックス 5">
+            <a:extLst>
+              <a:ext uri="{FF2B5EF4-FFF2-40B4-BE49-F238E27FC236}">
+                <a16:creationId xmlns:a16="http://schemas.microsoft.com/office/drawing/2014/main" id="{55830AD6-028B-4C4E-80BF-B70DFC1C3A46}"/>
+              </a:ext>
+            </a:extLst>
+          </p:cNvPr>
+          <p:cNvSpPr txBox="1"/>
+          <p:nvPr/>
+        </p:nvSpPr>
+        <p:spPr>
+          <a:xfrm>
+            <a:off x="567542" y="1216429"/>
+            <a:ext cx="10341293" cy="4524315"/>
+          </a:xfrm>
+          <a:prstGeom prst="rect">
+            <a:avLst/>
+          </a:prstGeom>
+          <a:noFill/>
+        </p:spPr>
+        <p:txBody>
+          <a:bodyPr wrap="none" rtlCol="0">
+            <a:spAutoFit/>
+          </a:bodyPr>
+          <a:lstStyle/>
+          <a:p>
+            <a:r>
+              <a:rPr lang="ja-JP" altLang="en-US" sz="2400" dirty="0"/>
+              <a:t>それぞれ以下のような意味となります。</a:t>
+            </a:r>
+            <a:endParaRPr lang="en-US" altLang="ja-JP" sz="2400" dirty="0"/>
+          </a:p>
+          <a:p>
+            <a:endParaRPr lang="en-US" altLang="ja-JP" sz="2400" dirty="0"/>
+          </a:p>
+          <a:p>
+            <a:r>
+              <a:rPr lang="en-US" altLang="ja-JP" sz="2400" b="1" dirty="0" err="1">
+                <a:solidFill>
+                  <a:srgbClr val="7030A0"/>
+                </a:solidFill>
+              </a:rPr>
+              <a:t>StateAuthority</a:t>
+            </a:r>
+            <a:r>
+              <a:rPr lang="en-US" altLang="ja-JP" sz="2400" dirty="0"/>
+              <a:t>	</a:t>
+            </a:r>
+            <a:r>
+              <a:rPr lang="ja-JP" altLang="en-US" sz="2400" dirty="0"/>
+              <a:t>・・・サーバーが呼び出せる</a:t>
+            </a:r>
+            <a:endParaRPr lang="en-US" altLang="ja-JP" sz="2400" dirty="0"/>
+          </a:p>
+          <a:p>
+            <a:r>
+              <a:rPr lang="en-US" altLang="ja-JP" sz="2400" b="1" dirty="0" err="1">
+                <a:solidFill>
+                  <a:srgbClr val="7030A0"/>
+                </a:solidFill>
+              </a:rPr>
+              <a:t>InputAuthority</a:t>
+            </a:r>
+            <a:r>
+              <a:rPr lang="en-US" altLang="ja-JP" sz="2400" dirty="0"/>
+              <a:t>	</a:t>
+            </a:r>
+            <a:r>
+              <a:rPr lang="ja-JP" altLang="en-US" sz="2400" dirty="0"/>
+              <a:t>・・・クライアントが呼び出せる</a:t>
+            </a:r>
+            <a:endParaRPr lang="en-US" altLang="ja-JP" sz="2400" dirty="0"/>
+          </a:p>
+          <a:p>
+            <a:r>
+              <a:rPr lang="en-US" altLang="ja-JP" sz="2400" b="1" dirty="0">
+                <a:solidFill>
+                  <a:srgbClr val="7030A0"/>
+                </a:solidFill>
+              </a:rPr>
+              <a:t>Proxies</a:t>
+            </a:r>
+            <a:r>
+              <a:rPr lang="en-US" altLang="ja-JP" sz="2400" dirty="0"/>
+              <a:t>		</a:t>
+            </a:r>
+            <a:r>
+              <a:rPr lang="ja-JP" altLang="en-US" sz="2400" dirty="0"/>
+              <a:t>・・・自分以外のクライアントが呼び出せる</a:t>
+            </a:r>
+            <a:endParaRPr lang="en-US" altLang="ja-JP" sz="2400" dirty="0"/>
+          </a:p>
+          <a:p>
+            <a:r>
+              <a:rPr lang="en-US" altLang="ja-JP" sz="2400" b="1" dirty="0">
+                <a:solidFill>
+                  <a:srgbClr val="7030A0"/>
+                </a:solidFill>
+              </a:rPr>
+              <a:t>All</a:t>
+            </a:r>
+            <a:r>
+              <a:rPr lang="en-US" altLang="ja-JP" sz="2400" dirty="0"/>
+              <a:t>			</a:t>
+            </a:r>
+            <a:r>
+              <a:rPr lang="ja-JP" altLang="en-US" sz="2400" dirty="0"/>
+              <a:t>・・・全員呼び出せる</a:t>
+            </a:r>
+            <a:endParaRPr lang="en-US" altLang="ja-JP" sz="2400" dirty="0"/>
+          </a:p>
+          <a:p>
+            <a:endParaRPr lang="en-US" altLang="ja-JP" sz="2400" dirty="0"/>
+          </a:p>
+          <a:p>
+            <a:r>
+              <a:rPr lang="en-US" altLang="ja-JP" sz="2400" b="1" dirty="0" err="1">
+                <a:solidFill>
+                  <a:srgbClr val="00B050"/>
+                </a:solidFill>
+              </a:rPr>
+              <a:t>RpcSources</a:t>
+            </a:r>
+            <a:r>
+              <a:rPr lang="en-US" altLang="ja-JP" sz="2400" dirty="0" err="1"/>
+              <a:t>.</a:t>
+            </a:r>
+            <a:r>
+              <a:rPr lang="en-US" altLang="ja-JP" sz="2400" b="1" dirty="0" err="1">
+                <a:solidFill>
+                  <a:srgbClr val="7030A0"/>
+                </a:solidFill>
+              </a:rPr>
+              <a:t>StateAuthority</a:t>
+            </a:r>
+            <a:r>
+              <a:rPr lang="ja-JP" altLang="en-US" sz="2400" dirty="0"/>
+              <a:t>の関数をクライアント側で呼び出しても、</a:t>
+            </a:r>
+            <a:endParaRPr lang="en-US" altLang="ja-JP" sz="2400" dirty="0"/>
+          </a:p>
+          <a:p>
+            <a:r>
+              <a:rPr lang="ja-JP" altLang="en-US" sz="2400" dirty="0"/>
+              <a:t>何も起きません。</a:t>
+            </a:r>
+            <a:endParaRPr lang="en-US" altLang="ja-JP" sz="2400" dirty="0"/>
+          </a:p>
+          <a:p>
+            <a:endParaRPr lang="en-US" altLang="ja-JP" sz="2400" dirty="0"/>
+          </a:p>
+          <a:p>
+            <a:r>
+              <a:rPr lang="ja-JP" altLang="en-US" sz="2400" dirty="0"/>
+              <a:t>今回はサーバー側で当たり判定してヒットしたときのエフェクトなので、</a:t>
+            </a:r>
+            <a:endParaRPr lang="en-US" altLang="ja-JP" sz="2400" dirty="0"/>
+          </a:p>
+          <a:p>
+            <a:r>
+              <a:rPr lang="en-US" altLang="ja-JP" sz="2400" b="1" dirty="0" err="1">
+                <a:solidFill>
+                  <a:srgbClr val="00B050"/>
+                </a:solidFill>
+              </a:rPr>
+              <a:t>RpcSources</a:t>
+            </a:r>
+            <a:r>
+              <a:rPr lang="en-US" altLang="ja-JP" sz="2400" dirty="0" err="1"/>
+              <a:t>.</a:t>
+            </a:r>
+            <a:r>
+              <a:rPr lang="en-US" altLang="ja-JP" sz="2400" b="1" dirty="0" err="1">
+                <a:solidFill>
+                  <a:srgbClr val="7030A0"/>
+                </a:solidFill>
+              </a:rPr>
+              <a:t>StateAuthority</a:t>
+            </a:r>
+            <a:r>
+              <a:rPr lang="ja-JP" altLang="en-US" sz="2400" dirty="0"/>
+              <a:t>となります。</a:t>
+            </a:r>
+            <a:endParaRPr lang="en-US" altLang="ja-JP" sz="2400" dirty="0"/>
+          </a:p>
+        </p:txBody>
+      </p:sp>
+    </p:spTree>
+    <p:extLst>
+      <p:ext uri="{BB962C8B-B14F-4D97-AF65-F5344CB8AC3E}">
+        <p14:creationId xmlns:p14="http://schemas.microsoft.com/office/powerpoint/2010/main" val="3656237033"/>
+      </p:ext>
+    </p:extLst>
+  </p:cSld>
+  <p:clrMapOvr>
+    <a:masterClrMapping/>
+  </p:clrMapOvr>
+</p:sld>
+</file>
+
+<file path=ppt/slides/slide9.xml><?xml version="1.0" encoding="utf-8"?>
+<p:sld xmlns:a="http://schemas.openxmlformats.org/drawingml/2006/main" xmlns:r="http://schemas.openxmlformats.org/officeDocument/2006/relationships" xmlns:p="http://schemas.openxmlformats.org/presentationml/2006/main">
+  <p:cSld>
+    <p:spTree>
+      <p:nvGrpSpPr>
+        <p:cNvPr id="1" name=""/>
+        <p:cNvGrpSpPr/>
+        <p:nvPr/>
+      </p:nvGrpSpPr>
+      <p:grpSpPr>
+        <a:xfrm>
+          <a:off x="0" y="0"/>
+          <a:ext cx="0" cy="0"/>
+          <a:chOff x="0" y="0"/>
+          <a:chExt cx="0" cy="0"/>
+        </a:xfrm>
+      </p:grpSpPr>
+      <p:sp>
+        <p:nvSpPr>
+          <p:cNvPr id="4" name="テキスト ボックス 3">
+            <a:extLst>
+              <a:ext uri="{FF2B5EF4-FFF2-40B4-BE49-F238E27FC236}">
+                <a16:creationId xmlns:a16="http://schemas.microsoft.com/office/drawing/2014/main" id="{5A13BF46-B8C5-48AA-8308-C9ECFF431A18}"/>
+              </a:ext>
+            </a:extLst>
+          </p:cNvPr>
+          <p:cNvSpPr txBox="1"/>
+          <p:nvPr/>
+        </p:nvSpPr>
+        <p:spPr>
+          <a:xfrm>
+            <a:off x="567542" y="491954"/>
+            <a:ext cx="2646878" cy="584775"/>
+          </a:xfrm>
+          <a:prstGeom prst="rect">
+            <a:avLst/>
+          </a:prstGeom>
+          <a:noFill/>
+        </p:spPr>
+        <p:txBody>
+          <a:bodyPr wrap="none" rtlCol="0">
+            <a:spAutoFit/>
+          </a:bodyPr>
+          <a:lstStyle/>
+          <a:p>
+            <a:r>
+              <a:rPr kumimoji="1" lang="ja-JP" altLang="en-US" sz="3200" b="1" u="sng" dirty="0"/>
+              <a:t>イベント同期</a:t>
+            </a:r>
+          </a:p>
+        </p:txBody>
+      </p:sp>
+      <p:sp>
+        <p:nvSpPr>
+          <p:cNvPr id="6" name="テキスト ボックス 5">
+            <a:extLst>
+              <a:ext uri="{FF2B5EF4-FFF2-40B4-BE49-F238E27FC236}">
+                <a16:creationId xmlns:a16="http://schemas.microsoft.com/office/drawing/2014/main" id="{55830AD6-028B-4C4E-80BF-B70DFC1C3A46}"/>
+              </a:ext>
+            </a:extLst>
+          </p:cNvPr>
+          <p:cNvSpPr txBox="1"/>
+          <p:nvPr/>
+        </p:nvSpPr>
+        <p:spPr>
+          <a:xfrm>
+            <a:off x="567542" y="1216429"/>
+            <a:ext cx="8980344" cy="461665"/>
+          </a:xfrm>
+          <a:prstGeom prst="rect">
+            <a:avLst/>
+          </a:prstGeom>
+          <a:noFill/>
+        </p:spPr>
+        <p:txBody>
+          <a:bodyPr wrap="none" rtlCol="0">
+            <a:spAutoFit/>
+          </a:bodyPr>
+          <a:lstStyle/>
+          <a:p>
+            <a:r>
+              <a:rPr lang="en-US" altLang="ja-JP" sz="2400" b="1" dirty="0" err="1">
+                <a:solidFill>
+                  <a:srgbClr val="00B050"/>
+                </a:solidFill>
+              </a:rPr>
+              <a:t>RpcTargets</a:t>
+            </a:r>
+            <a:r>
+              <a:rPr lang="ja-JP" altLang="en-US" sz="2400" dirty="0"/>
+              <a:t>とは、この関数を実行するターゲットになります。</a:t>
+            </a:r>
+            <a:endParaRPr lang="en-US" altLang="ja-JP" sz="2400" dirty="0"/>
+          </a:p>
+        </p:txBody>
+      </p:sp>
+      <p:pic>
+        <p:nvPicPr>
+          <p:cNvPr id="5" name="図 4">
+            <a:extLst>
+              <a:ext uri="{FF2B5EF4-FFF2-40B4-BE49-F238E27FC236}">
+                <a16:creationId xmlns:a16="http://schemas.microsoft.com/office/drawing/2014/main" id="{AD4074CA-2C27-42DE-BDDD-EC3170219BC7}"/>
+              </a:ext>
+            </a:extLst>
+          </p:cNvPr>
+          <p:cNvPicPr>
+            <a:picLocks noChangeAspect="1"/>
+          </p:cNvPicPr>
+          <p:nvPr/>
+        </p:nvPicPr>
+        <p:blipFill>
+          <a:blip r:embed="rId2"/>
+          <a:stretch>
+            <a:fillRect/>
+          </a:stretch>
+        </p:blipFill>
+        <p:spPr>
+          <a:xfrm>
+            <a:off x="567542" y="1817794"/>
+            <a:ext cx="7973538" cy="4867954"/>
+          </a:xfrm>
+          <a:prstGeom prst="rect">
+            <a:avLst/>
+          </a:prstGeom>
+        </p:spPr>
+      </p:pic>
+    </p:spTree>
+    <p:extLst>
+      <p:ext uri="{BB962C8B-B14F-4D97-AF65-F5344CB8AC3E}">
+        <p14:creationId xmlns:p14="http://schemas.microsoft.com/office/powerpoint/2010/main" val="216334993"/>
       </p:ext>
     </p:extLst>
   </p:cSld>

--- a/ゲーム科3年/00_前期/オンラインゲームプログラミングⅡ/07_イベント同期.pptx
+++ b/ゲーム科3年/00_前期/オンラインゲームプログラミングⅡ/07_イベント同期.pptx
@@ -15,6 +15,9 @@
     <p:sldId id="264" r:id="rId9"/>
     <p:sldId id="265" r:id="rId10"/>
     <p:sldId id="266" r:id="rId11"/>
+    <p:sldId id="267" r:id="rId12"/>
+    <p:sldId id="268" r:id="rId13"/>
+    <p:sldId id="269" r:id="rId14"/>
   </p:sldIdLst>
   <p:sldSz cx="12192000" cy="6858000"/>
   <p:notesSz cx="6858000" cy="9144000"/>
@@ -4023,7 +4026,19 @@
                   <a:srgbClr val="7030A0"/>
                 </a:solidFill>
               </a:rPr>
-              <a:t> | </a:t>
+              <a:t> </a:t>
+            </a:r>
+            <a:r>
+              <a:rPr lang="en-US" altLang="ja-JP" sz="2400" dirty="0"/>
+              <a:t>|</a:t>
+            </a:r>
+            <a:r>
+              <a:rPr lang="en-US" altLang="ja-JP" sz="2400" b="1" dirty="0">
+                <a:solidFill>
+                  <a:srgbClr val="7030A0"/>
+                </a:solidFill>
+              </a:rPr>
+              <a:t> </a:t>
             </a:r>
             <a:r>
               <a:rPr lang="en-US" altLang="ja-JP" sz="2400" b="1" dirty="0" err="1">
@@ -4057,6 +4072,1531 @@
     <p:extLst>
       <p:ext uri="{BB962C8B-B14F-4D97-AF65-F5344CB8AC3E}">
         <p14:creationId xmlns:p14="http://schemas.microsoft.com/office/powerpoint/2010/main" val="3122861717"/>
+      </p:ext>
+    </p:extLst>
+  </p:cSld>
+  <p:clrMapOvr>
+    <a:masterClrMapping/>
+  </p:clrMapOvr>
+</p:sld>
+</file>
+
+<file path=ppt/slides/slide11.xml><?xml version="1.0" encoding="utf-8"?>
+<p:sld xmlns:a="http://schemas.openxmlformats.org/drawingml/2006/main" xmlns:r="http://schemas.openxmlformats.org/officeDocument/2006/relationships" xmlns:p="http://schemas.openxmlformats.org/presentationml/2006/main">
+  <p:cSld>
+    <p:spTree>
+      <p:nvGrpSpPr>
+        <p:cNvPr id="1" name=""/>
+        <p:cNvGrpSpPr/>
+        <p:nvPr/>
+      </p:nvGrpSpPr>
+      <p:grpSpPr>
+        <a:xfrm>
+          <a:off x="0" y="0"/>
+          <a:ext cx="0" cy="0"/>
+          <a:chOff x="0" y="0"/>
+          <a:chExt cx="0" cy="0"/>
+        </a:xfrm>
+      </p:grpSpPr>
+      <p:sp>
+        <p:nvSpPr>
+          <p:cNvPr id="4" name="テキスト ボックス 3">
+            <a:extLst>
+              <a:ext uri="{FF2B5EF4-FFF2-40B4-BE49-F238E27FC236}">
+                <a16:creationId xmlns:a16="http://schemas.microsoft.com/office/drawing/2014/main" id="{5A13BF46-B8C5-48AA-8308-C9ECFF431A18}"/>
+              </a:ext>
+            </a:extLst>
+          </p:cNvPr>
+          <p:cNvSpPr txBox="1"/>
+          <p:nvPr/>
+        </p:nvSpPr>
+        <p:spPr>
+          <a:xfrm>
+            <a:off x="567542" y="491954"/>
+            <a:ext cx="2646878" cy="584775"/>
+          </a:xfrm>
+          <a:prstGeom prst="rect">
+            <a:avLst/>
+          </a:prstGeom>
+          <a:noFill/>
+        </p:spPr>
+        <p:txBody>
+          <a:bodyPr wrap="none" rtlCol="0">
+            <a:spAutoFit/>
+          </a:bodyPr>
+          <a:lstStyle/>
+          <a:p>
+            <a:r>
+              <a:rPr kumimoji="1" lang="ja-JP" altLang="en-US" sz="3200" b="1" u="sng" dirty="0"/>
+              <a:t>イベント同期</a:t>
+            </a:r>
+          </a:p>
+        </p:txBody>
+      </p:sp>
+      <p:sp>
+        <p:nvSpPr>
+          <p:cNvPr id="6" name="テキスト ボックス 5">
+            <a:extLst>
+              <a:ext uri="{FF2B5EF4-FFF2-40B4-BE49-F238E27FC236}">
+                <a16:creationId xmlns:a16="http://schemas.microsoft.com/office/drawing/2014/main" id="{55830AD6-028B-4C4E-80BF-B70DFC1C3A46}"/>
+              </a:ext>
+            </a:extLst>
+          </p:cNvPr>
+          <p:cNvSpPr txBox="1"/>
+          <p:nvPr/>
+        </p:nvSpPr>
+        <p:spPr>
+          <a:xfrm>
+            <a:off x="567542" y="1216429"/>
+            <a:ext cx="8262198" cy="830997"/>
+          </a:xfrm>
+          <a:prstGeom prst="rect">
+            <a:avLst/>
+          </a:prstGeom>
+          <a:noFill/>
+        </p:spPr>
+        <p:txBody>
+          <a:bodyPr wrap="none" rtlCol="0">
+            <a:spAutoFit/>
+          </a:bodyPr>
+          <a:lstStyle/>
+          <a:p>
+            <a:r>
+              <a:rPr lang="en-US" altLang="ja-JP" sz="2400" b="1" dirty="0" err="1">
+                <a:solidFill>
+                  <a:srgbClr val="00B050"/>
+                </a:solidFill>
+              </a:rPr>
+              <a:t>RpcSources</a:t>
+            </a:r>
+            <a:r>
+              <a:rPr lang="en-US" altLang="ja-JP" sz="2400" dirty="0" err="1"/>
+              <a:t>.</a:t>
+            </a:r>
+            <a:r>
+              <a:rPr lang="en-US" altLang="ja-JP" sz="2400" b="1" dirty="0" err="1">
+                <a:solidFill>
+                  <a:srgbClr val="7030A0"/>
+                </a:solidFill>
+              </a:rPr>
+              <a:t>StateAuthority</a:t>
+            </a:r>
+            <a:r>
+              <a:rPr lang="ja-JP" altLang="en-US" sz="2400" dirty="0"/>
+              <a:t>で</a:t>
+            </a:r>
+            <a:r>
+              <a:rPr lang="en-US" altLang="ja-JP" sz="2400" b="1" dirty="0" err="1">
+                <a:solidFill>
+                  <a:srgbClr val="00B050"/>
+                </a:solidFill>
+              </a:rPr>
+              <a:t>RpcTargets</a:t>
+            </a:r>
+            <a:r>
+              <a:rPr lang="en-US" altLang="ja-JP" sz="2400" dirty="0" err="1"/>
+              <a:t>.</a:t>
+            </a:r>
+            <a:r>
+              <a:rPr lang="en-US" altLang="ja-JP" sz="2400" b="1" dirty="0" err="1">
+                <a:solidFill>
+                  <a:srgbClr val="7030A0"/>
+                </a:solidFill>
+              </a:rPr>
+              <a:t>All</a:t>
+            </a:r>
+            <a:r>
+              <a:rPr lang="ja-JP" altLang="en-US" sz="2400" dirty="0"/>
+              <a:t>の場合は、</a:t>
+            </a:r>
+            <a:endParaRPr lang="en-US" altLang="ja-JP" sz="2400" dirty="0"/>
+          </a:p>
+          <a:p>
+            <a:r>
+              <a:rPr lang="ja-JP" altLang="en-US" sz="2400" dirty="0"/>
+              <a:t>以下のような流れになります。</a:t>
+            </a:r>
+            <a:endParaRPr lang="en-US" altLang="ja-JP" sz="2400" dirty="0"/>
+          </a:p>
+        </p:txBody>
+      </p:sp>
+      <p:sp>
+        <p:nvSpPr>
+          <p:cNvPr id="2" name="四角形: 角を丸くする 1">
+            <a:extLst>
+              <a:ext uri="{FF2B5EF4-FFF2-40B4-BE49-F238E27FC236}">
+                <a16:creationId xmlns:a16="http://schemas.microsoft.com/office/drawing/2014/main" id="{42A6F57A-A9B2-4028-BB6B-D56AC104F249}"/>
+              </a:ext>
+            </a:extLst>
+          </p:cNvPr>
+          <p:cNvSpPr/>
+          <p:nvPr/>
+        </p:nvSpPr>
+        <p:spPr>
+          <a:xfrm>
+            <a:off x="708212" y="3426742"/>
+            <a:ext cx="1398494" cy="887506"/>
+          </a:xfrm>
+          <a:prstGeom prst="roundRect">
+            <a:avLst/>
+          </a:prstGeom>
+        </p:spPr>
+        <p:style>
+          <a:lnRef idx="2">
+            <a:schemeClr val="accent6">
+              <a:shade val="50000"/>
+            </a:schemeClr>
+          </a:lnRef>
+          <a:fillRef idx="1">
+            <a:schemeClr val="accent6"/>
+          </a:fillRef>
+          <a:effectRef idx="0">
+            <a:schemeClr val="accent6"/>
+          </a:effectRef>
+          <a:fontRef idx="minor">
+            <a:schemeClr val="lt1"/>
+          </a:fontRef>
+        </p:style>
+        <p:txBody>
+          <a:bodyPr rtlCol="0" anchor="ctr"/>
+          <a:lstStyle/>
+          <a:p>
+            <a:pPr algn="ctr"/>
+            <a:r>
+              <a:rPr kumimoji="1" lang="ja-JP" altLang="en-US" b="1" dirty="0"/>
+              <a:t>サーバー</a:t>
+            </a:r>
+          </a:p>
+        </p:txBody>
+      </p:sp>
+      <p:sp>
+        <p:nvSpPr>
+          <p:cNvPr id="3" name="矢印: 右 2">
+            <a:extLst>
+              <a:ext uri="{FF2B5EF4-FFF2-40B4-BE49-F238E27FC236}">
+                <a16:creationId xmlns:a16="http://schemas.microsoft.com/office/drawing/2014/main" id="{58508806-3477-4FBA-9FAE-2E6FC1750A8E}"/>
+              </a:ext>
+            </a:extLst>
+          </p:cNvPr>
+          <p:cNvSpPr/>
+          <p:nvPr/>
+        </p:nvSpPr>
+        <p:spPr>
+          <a:xfrm>
+            <a:off x="2357718" y="2779058"/>
+            <a:ext cx="2354943" cy="2185130"/>
+          </a:xfrm>
+          <a:prstGeom prst="rightArrow">
+            <a:avLst/>
+          </a:prstGeom>
+        </p:spPr>
+        <p:style>
+          <a:lnRef idx="2">
+            <a:schemeClr val="accent2">
+              <a:shade val="50000"/>
+            </a:schemeClr>
+          </a:lnRef>
+          <a:fillRef idx="1">
+            <a:schemeClr val="accent2"/>
+          </a:fillRef>
+          <a:effectRef idx="0">
+            <a:schemeClr val="accent2"/>
+          </a:effectRef>
+          <a:fontRef idx="minor">
+            <a:schemeClr val="lt1"/>
+          </a:fontRef>
+        </p:style>
+        <p:txBody>
+          <a:bodyPr rtlCol="0" anchor="ctr"/>
+          <a:lstStyle/>
+          <a:p>
+            <a:pPr algn="ctr"/>
+            <a:r>
+              <a:rPr kumimoji="1" lang="en-US" altLang="ja-JP" sz="1200" b="1" dirty="0" err="1">
+                <a:solidFill>
+                  <a:srgbClr val="0070C0"/>
+                </a:solidFill>
+              </a:rPr>
+              <a:t>RPC_PlayEffect</a:t>
+            </a:r>
+            <a:r>
+              <a:rPr kumimoji="1" lang="ja-JP" altLang="en-US" sz="1200" b="1" dirty="0"/>
+              <a:t>呼出し</a:t>
+            </a:r>
+          </a:p>
+        </p:txBody>
+      </p:sp>
+      <p:sp>
+        <p:nvSpPr>
+          <p:cNvPr id="7" name="四角形: 角を丸くする 6">
+            <a:extLst>
+              <a:ext uri="{FF2B5EF4-FFF2-40B4-BE49-F238E27FC236}">
+                <a16:creationId xmlns:a16="http://schemas.microsoft.com/office/drawing/2014/main" id="{31C287D2-8C1E-4CBC-AC29-0FBF4D4825AA}"/>
+              </a:ext>
+            </a:extLst>
+          </p:cNvPr>
+          <p:cNvSpPr/>
+          <p:nvPr/>
+        </p:nvSpPr>
+        <p:spPr>
+          <a:xfrm>
+            <a:off x="4831972" y="2335306"/>
+            <a:ext cx="1810871" cy="887506"/>
+          </a:xfrm>
+          <a:prstGeom prst="roundRect">
+            <a:avLst/>
+          </a:prstGeom>
+        </p:spPr>
+        <p:style>
+          <a:lnRef idx="2">
+            <a:schemeClr val="accent1">
+              <a:shade val="50000"/>
+            </a:schemeClr>
+          </a:lnRef>
+          <a:fillRef idx="1">
+            <a:schemeClr val="accent1"/>
+          </a:fillRef>
+          <a:effectRef idx="0">
+            <a:schemeClr val="accent1"/>
+          </a:effectRef>
+          <a:fontRef idx="minor">
+            <a:schemeClr val="lt1"/>
+          </a:fontRef>
+        </p:style>
+        <p:txBody>
+          <a:bodyPr rtlCol="0" anchor="ctr"/>
+          <a:lstStyle/>
+          <a:p>
+            <a:pPr algn="ctr"/>
+            <a:r>
+              <a:rPr kumimoji="1" lang="ja-JP" altLang="en-US" b="1" dirty="0"/>
+              <a:t>クライアント</a:t>
+            </a:r>
+            <a:r>
+              <a:rPr kumimoji="1" lang="en-US" altLang="ja-JP" b="1" dirty="0"/>
+              <a:t>A</a:t>
+            </a:r>
+            <a:endParaRPr kumimoji="1" lang="ja-JP" altLang="en-US" b="1" dirty="0"/>
+          </a:p>
+        </p:txBody>
+      </p:sp>
+      <p:sp>
+        <p:nvSpPr>
+          <p:cNvPr id="8" name="四角形: 角を丸くする 7">
+            <a:extLst>
+              <a:ext uri="{FF2B5EF4-FFF2-40B4-BE49-F238E27FC236}">
+                <a16:creationId xmlns:a16="http://schemas.microsoft.com/office/drawing/2014/main" id="{C392E8CD-69FD-4579-B467-973E0B2FFE8F}"/>
+              </a:ext>
+            </a:extLst>
+          </p:cNvPr>
+          <p:cNvSpPr/>
+          <p:nvPr/>
+        </p:nvSpPr>
+        <p:spPr>
+          <a:xfrm>
+            <a:off x="4831971" y="3426742"/>
+            <a:ext cx="1810871" cy="887506"/>
+          </a:xfrm>
+          <a:prstGeom prst="roundRect">
+            <a:avLst/>
+          </a:prstGeom>
+        </p:spPr>
+        <p:style>
+          <a:lnRef idx="2">
+            <a:schemeClr val="accent1">
+              <a:shade val="50000"/>
+            </a:schemeClr>
+          </a:lnRef>
+          <a:fillRef idx="1">
+            <a:schemeClr val="accent1"/>
+          </a:fillRef>
+          <a:effectRef idx="0">
+            <a:schemeClr val="accent1"/>
+          </a:effectRef>
+          <a:fontRef idx="minor">
+            <a:schemeClr val="lt1"/>
+          </a:fontRef>
+        </p:style>
+        <p:txBody>
+          <a:bodyPr rtlCol="0" anchor="ctr"/>
+          <a:lstStyle/>
+          <a:p>
+            <a:pPr algn="ctr"/>
+            <a:r>
+              <a:rPr kumimoji="1" lang="ja-JP" altLang="en-US" b="1" dirty="0"/>
+              <a:t>クライアント</a:t>
+            </a:r>
+            <a:r>
+              <a:rPr kumimoji="1" lang="en-US" altLang="ja-JP" b="1" dirty="0"/>
+              <a:t>B</a:t>
+            </a:r>
+            <a:endParaRPr kumimoji="1" lang="ja-JP" altLang="en-US" b="1" dirty="0"/>
+          </a:p>
+        </p:txBody>
+      </p:sp>
+      <p:sp>
+        <p:nvSpPr>
+          <p:cNvPr id="9" name="テキスト ボックス 8">
+            <a:extLst>
+              <a:ext uri="{FF2B5EF4-FFF2-40B4-BE49-F238E27FC236}">
+                <a16:creationId xmlns:a16="http://schemas.microsoft.com/office/drawing/2014/main" id="{A0DF18AF-DA86-42CE-BA81-FE971FABD4D8}"/>
+              </a:ext>
+            </a:extLst>
+          </p:cNvPr>
+          <p:cNvSpPr txBox="1"/>
+          <p:nvPr/>
+        </p:nvSpPr>
+        <p:spPr>
+          <a:xfrm>
+            <a:off x="6762151" y="2548225"/>
+            <a:ext cx="3145413" cy="461665"/>
+          </a:xfrm>
+          <a:prstGeom prst="rect">
+            <a:avLst/>
+          </a:prstGeom>
+          <a:noFill/>
+        </p:spPr>
+        <p:txBody>
+          <a:bodyPr wrap="none" rtlCol="0">
+            <a:spAutoFit/>
+          </a:bodyPr>
+          <a:lstStyle/>
+          <a:p>
+            <a:r>
+              <a:rPr lang="en-US" altLang="ja-JP" sz="2400" b="1" dirty="0" err="1">
+                <a:solidFill>
+                  <a:srgbClr val="0070C0"/>
+                </a:solidFill>
+              </a:rPr>
+              <a:t>RPC_PlayEffect</a:t>
+            </a:r>
+            <a:r>
+              <a:rPr lang="ja-JP" altLang="en-US" sz="2400" dirty="0"/>
+              <a:t>実行</a:t>
+            </a:r>
+            <a:endParaRPr lang="en-US" altLang="ja-JP" sz="2400" dirty="0"/>
+          </a:p>
+        </p:txBody>
+      </p:sp>
+      <p:sp>
+        <p:nvSpPr>
+          <p:cNvPr id="10" name="テキスト ボックス 9">
+            <a:extLst>
+              <a:ext uri="{FF2B5EF4-FFF2-40B4-BE49-F238E27FC236}">
+                <a16:creationId xmlns:a16="http://schemas.microsoft.com/office/drawing/2014/main" id="{E52F6C63-94B6-4A22-AEEF-279F24D83B97}"/>
+              </a:ext>
+            </a:extLst>
+          </p:cNvPr>
+          <p:cNvSpPr txBox="1"/>
+          <p:nvPr/>
+        </p:nvSpPr>
+        <p:spPr>
+          <a:xfrm>
+            <a:off x="6762153" y="3639662"/>
+            <a:ext cx="3145413" cy="461665"/>
+          </a:xfrm>
+          <a:prstGeom prst="rect">
+            <a:avLst/>
+          </a:prstGeom>
+          <a:noFill/>
+        </p:spPr>
+        <p:txBody>
+          <a:bodyPr wrap="none" rtlCol="0">
+            <a:spAutoFit/>
+          </a:bodyPr>
+          <a:lstStyle/>
+          <a:p>
+            <a:r>
+              <a:rPr lang="en-US" altLang="ja-JP" sz="2400" b="1" dirty="0" err="1">
+                <a:solidFill>
+                  <a:srgbClr val="0070C0"/>
+                </a:solidFill>
+              </a:rPr>
+              <a:t>RPC_PlayEffect</a:t>
+            </a:r>
+            <a:r>
+              <a:rPr lang="ja-JP" altLang="en-US" sz="2400" dirty="0"/>
+              <a:t>実行</a:t>
+            </a:r>
+            <a:endParaRPr lang="en-US" altLang="ja-JP" sz="2400" dirty="0"/>
+          </a:p>
+        </p:txBody>
+      </p:sp>
+      <p:sp>
+        <p:nvSpPr>
+          <p:cNvPr id="11" name="テキスト ボックス 10">
+            <a:extLst>
+              <a:ext uri="{FF2B5EF4-FFF2-40B4-BE49-F238E27FC236}">
+                <a16:creationId xmlns:a16="http://schemas.microsoft.com/office/drawing/2014/main" id="{455DF58D-113C-4C47-8A48-57A8FCE8FAC8}"/>
+              </a:ext>
+            </a:extLst>
+          </p:cNvPr>
+          <p:cNvSpPr txBox="1"/>
+          <p:nvPr/>
+        </p:nvSpPr>
+        <p:spPr>
+          <a:xfrm>
+            <a:off x="226102" y="4607894"/>
+            <a:ext cx="3329758" cy="923330"/>
+          </a:xfrm>
+          <a:prstGeom prst="rect">
+            <a:avLst/>
+          </a:prstGeom>
+          <a:noFill/>
+        </p:spPr>
+        <p:txBody>
+          <a:bodyPr wrap="none" rtlCol="0">
+            <a:spAutoFit/>
+          </a:bodyPr>
+          <a:lstStyle/>
+          <a:p>
+            <a:r>
+              <a:rPr lang="en-US" altLang="ja-JP" dirty="0"/>
+              <a:t>All</a:t>
+            </a:r>
+            <a:r>
+              <a:rPr lang="ja-JP" altLang="en-US" dirty="0"/>
+              <a:t>なのでサーバーでも</a:t>
+            </a:r>
+            <a:endParaRPr lang="en-US" altLang="ja-JP" dirty="0"/>
+          </a:p>
+          <a:p>
+            <a:r>
+              <a:rPr lang="en-US" altLang="ja-JP" b="1" dirty="0" err="1">
+                <a:solidFill>
+                  <a:srgbClr val="0070C0"/>
+                </a:solidFill>
+              </a:rPr>
+              <a:t>RPC_PlayEffect</a:t>
+            </a:r>
+            <a:r>
+              <a:rPr lang="ja-JP" altLang="en-US" dirty="0"/>
+              <a:t>は実行する。</a:t>
+            </a:r>
+            <a:endParaRPr lang="en-US" altLang="ja-JP" dirty="0"/>
+          </a:p>
+          <a:p>
+            <a:r>
+              <a:rPr lang="ja-JP" altLang="en-US" dirty="0"/>
+              <a:t>実は無駄だったり。。</a:t>
+            </a:r>
+            <a:endParaRPr lang="en-US" altLang="ja-JP" dirty="0"/>
+          </a:p>
+        </p:txBody>
+      </p:sp>
+      <p:sp>
+        <p:nvSpPr>
+          <p:cNvPr id="12" name="四角形: 角を丸くする 11">
+            <a:extLst>
+              <a:ext uri="{FF2B5EF4-FFF2-40B4-BE49-F238E27FC236}">
+                <a16:creationId xmlns:a16="http://schemas.microsoft.com/office/drawing/2014/main" id="{0EF38D9E-7EFC-4587-95A9-FDB5CE867C9E}"/>
+              </a:ext>
+            </a:extLst>
+          </p:cNvPr>
+          <p:cNvSpPr/>
+          <p:nvPr/>
+        </p:nvSpPr>
+        <p:spPr>
+          <a:xfrm>
+            <a:off x="4831972" y="4643718"/>
+            <a:ext cx="1810871" cy="887506"/>
+          </a:xfrm>
+          <a:prstGeom prst="roundRect">
+            <a:avLst/>
+          </a:prstGeom>
+        </p:spPr>
+        <p:style>
+          <a:lnRef idx="2">
+            <a:schemeClr val="accent1">
+              <a:shade val="50000"/>
+            </a:schemeClr>
+          </a:lnRef>
+          <a:fillRef idx="1">
+            <a:schemeClr val="accent1"/>
+          </a:fillRef>
+          <a:effectRef idx="0">
+            <a:schemeClr val="accent1"/>
+          </a:effectRef>
+          <a:fontRef idx="minor">
+            <a:schemeClr val="lt1"/>
+          </a:fontRef>
+        </p:style>
+        <p:txBody>
+          <a:bodyPr rtlCol="0" anchor="ctr"/>
+          <a:lstStyle/>
+          <a:p>
+            <a:pPr algn="ctr"/>
+            <a:r>
+              <a:rPr kumimoji="1" lang="ja-JP" altLang="en-US" b="1" dirty="0"/>
+              <a:t>クライアント</a:t>
+            </a:r>
+            <a:r>
+              <a:rPr kumimoji="1" lang="en-US" altLang="ja-JP" b="1" dirty="0"/>
+              <a:t>C</a:t>
+            </a:r>
+            <a:endParaRPr kumimoji="1" lang="ja-JP" altLang="en-US" b="1" dirty="0"/>
+          </a:p>
+        </p:txBody>
+      </p:sp>
+      <p:sp>
+        <p:nvSpPr>
+          <p:cNvPr id="13" name="テキスト ボックス 12">
+            <a:extLst>
+              <a:ext uri="{FF2B5EF4-FFF2-40B4-BE49-F238E27FC236}">
+                <a16:creationId xmlns:a16="http://schemas.microsoft.com/office/drawing/2014/main" id="{1AB42457-0921-4328-AD0E-3CAEB2050F1B}"/>
+              </a:ext>
+            </a:extLst>
+          </p:cNvPr>
+          <p:cNvSpPr txBox="1"/>
+          <p:nvPr/>
+        </p:nvSpPr>
+        <p:spPr>
+          <a:xfrm>
+            <a:off x="6762152" y="4856638"/>
+            <a:ext cx="3145413" cy="461665"/>
+          </a:xfrm>
+          <a:prstGeom prst="rect">
+            <a:avLst/>
+          </a:prstGeom>
+          <a:noFill/>
+        </p:spPr>
+        <p:txBody>
+          <a:bodyPr wrap="none" rtlCol="0">
+            <a:spAutoFit/>
+          </a:bodyPr>
+          <a:lstStyle/>
+          <a:p>
+            <a:r>
+              <a:rPr lang="en-US" altLang="ja-JP" sz="2400" b="1" dirty="0" err="1">
+                <a:solidFill>
+                  <a:srgbClr val="0070C0"/>
+                </a:solidFill>
+              </a:rPr>
+              <a:t>RPC_PlayEffect</a:t>
+            </a:r>
+            <a:r>
+              <a:rPr lang="ja-JP" altLang="en-US" sz="2400" dirty="0"/>
+              <a:t>実行</a:t>
+            </a:r>
+            <a:endParaRPr lang="en-US" altLang="ja-JP" sz="2400" dirty="0"/>
+          </a:p>
+        </p:txBody>
+      </p:sp>
+      <p:sp>
+        <p:nvSpPr>
+          <p:cNvPr id="14" name="テキスト ボックス 13">
+            <a:extLst>
+              <a:ext uri="{FF2B5EF4-FFF2-40B4-BE49-F238E27FC236}">
+                <a16:creationId xmlns:a16="http://schemas.microsoft.com/office/drawing/2014/main" id="{5FB4CD2B-51C9-4C6B-9D24-1E319000AC06}"/>
+              </a:ext>
+            </a:extLst>
+          </p:cNvPr>
+          <p:cNvSpPr txBox="1"/>
+          <p:nvPr/>
+        </p:nvSpPr>
+        <p:spPr>
+          <a:xfrm>
+            <a:off x="567542" y="5881839"/>
+            <a:ext cx="8186857" cy="461665"/>
+          </a:xfrm>
+          <a:prstGeom prst="rect">
+            <a:avLst/>
+          </a:prstGeom>
+          <a:noFill/>
+        </p:spPr>
+        <p:txBody>
+          <a:bodyPr wrap="none" rtlCol="0">
+            <a:spAutoFit/>
+          </a:bodyPr>
+          <a:lstStyle/>
+          <a:p>
+            <a:r>
+              <a:rPr lang="ja-JP" altLang="en-US" sz="2400" dirty="0"/>
+              <a:t>サーバーで判定してから実行する処理によく使われます。</a:t>
+            </a:r>
+            <a:endParaRPr lang="en-US" altLang="ja-JP" sz="2400" dirty="0"/>
+          </a:p>
+        </p:txBody>
+      </p:sp>
+    </p:spTree>
+    <p:extLst>
+      <p:ext uri="{BB962C8B-B14F-4D97-AF65-F5344CB8AC3E}">
+        <p14:creationId xmlns:p14="http://schemas.microsoft.com/office/powerpoint/2010/main" val="1293034332"/>
+      </p:ext>
+    </p:extLst>
+  </p:cSld>
+  <p:clrMapOvr>
+    <a:masterClrMapping/>
+  </p:clrMapOvr>
+</p:sld>
+</file>
+
+<file path=ppt/slides/slide12.xml><?xml version="1.0" encoding="utf-8"?>
+<p:sld xmlns:a="http://schemas.openxmlformats.org/drawingml/2006/main" xmlns:r="http://schemas.openxmlformats.org/officeDocument/2006/relationships" xmlns:p="http://schemas.openxmlformats.org/presentationml/2006/main">
+  <p:cSld>
+    <p:spTree>
+      <p:nvGrpSpPr>
+        <p:cNvPr id="1" name=""/>
+        <p:cNvGrpSpPr/>
+        <p:nvPr/>
+      </p:nvGrpSpPr>
+      <p:grpSpPr>
+        <a:xfrm>
+          <a:off x="0" y="0"/>
+          <a:ext cx="0" cy="0"/>
+          <a:chOff x="0" y="0"/>
+          <a:chExt cx="0" cy="0"/>
+        </a:xfrm>
+      </p:grpSpPr>
+      <p:sp>
+        <p:nvSpPr>
+          <p:cNvPr id="4" name="テキスト ボックス 3">
+            <a:extLst>
+              <a:ext uri="{FF2B5EF4-FFF2-40B4-BE49-F238E27FC236}">
+                <a16:creationId xmlns:a16="http://schemas.microsoft.com/office/drawing/2014/main" id="{5A13BF46-B8C5-48AA-8308-C9ECFF431A18}"/>
+              </a:ext>
+            </a:extLst>
+          </p:cNvPr>
+          <p:cNvSpPr txBox="1"/>
+          <p:nvPr/>
+        </p:nvSpPr>
+        <p:spPr>
+          <a:xfrm>
+            <a:off x="567542" y="491954"/>
+            <a:ext cx="2646878" cy="584775"/>
+          </a:xfrm>
+          <a:prstGeom prst="rect">
+            <a:avLst/>
+          </a:prstGeom>
+          <a:noFill/>
+        </p:spPr>
+        <p:txBody>
+          <a:bodyPr wrap="none" rtlCol="0">
+            <a:spAutoFit/>
+          </a:bodyPr>
+          <a:lstStyle/>
+          <a:p>
+            <a:r>
+              <a:rPr kumimoji="1" lang="ja-JP" altLang="en-US" sz="3200" b="1" u="sng" dirty="0"/>
+              <a:t>イベント同期</a:t>
+            </a:r>
+          </a:p>
+        </p:txBody>
+      </p:sp>
+      <p:sp>
+        <p:nvSpPr>
+          <p:cNvPr id="6" name="テキスト ボックス 5">
+            <a:extLst>
+              <a:ext uri="{FF2B5EF4-FFF2-40B4-BE49-F238E27FC236}">
+                <a16:creationId xmlns:a16="http://schemas.microsoft.com/office/drawing/2014/main" id="{55830AD6-028B-4C4E-80BF-B70DFC1C3A46}"/>
+              </a:ext>
+            </a:extLst>
+          </p:cNvPr>
+          <p:cNvSpPr txBox="1"/>
+          <p:nvPr/>
+        </p:nvSpPr>
+        <p:spPr>
+          <a:xfrm>
+            <a:off x="567542" y="1216429"/>
+            <a:ext cx="10043134" cy="830997"/>
+          </a:xfrm>
+          <a:prstGeom prst="rect">
+            <a:avLst/>
+          </a:prstGeom>
+          <a:noFill/>
+        </p:spPr>
+        <p:txBody>
+          <a:bodyPr wrap="none" rtlCol="0">
+            <a:spAutoFit/>
+          </a:bodyPr>
+          <a:lstStyle/>
+          <a:p>
+            <a:r>
+              <a:rPr lang="en-US" altLang="ja-JP" sz="2400" b="1" dirty="0" err="1">
+                <a:solidFill>
+                  <a:srgbClr val="00B050"/>
+                </a:solidFill>
+              </a:rPr>
+              <a:t>RpcSources</a:t>
+            </a:r>
+            <a:r>
+              <a:rPr lang="en-US" altLang="ja-JP" sz="2400" dirty="0" err="1"/>
+              <a:t>.</a:t>
+            </a:r>
+            <a:r>
+              <a:rPr lang="en-US" altLang="ja-JP" sz="2400" b="1" dirty="0" err="1">
+                <a:solidFill>
+                  <a:srgbClr val="7030A0"/>
+                </a:solidFill>
+              </a:rPr>
+              <a:t>InputAuthority</a:t>
+            </a:r>
+            <a:r>
+              <a:rPr lang="ja-JP" altLang="en-US" sz="2400" dirty="0"/>
+              <a:t>で</a:t>
+            </a:r>
+            <a:r>
+              <a:rPr lang="en-US" altLang="ja-JP" sz="2400" b="1" dirty="0" err="1">
+                <a:solidFill>
+                  <a:srgbClr val="00B050"/>
+                </a:solidFill>
+              </a:rPr>
+              <a:t>RpcTargets</a:t>
+            </a:r>
+            <a:r>
+              <a:rPr lang="en-US" altLang="ja-JP" sz="2400" dirty="0" err="1"/>
+              <a:t>.</a:t>
+            </a:r>
+            <a:r>
+              <a:rPr lang="en-US" altLang="ja-JP" sz="2400" b="1" dirty="0" err="1">
+                <a:solidFill>
+                  <a:srgbClr val="7030A0"/>
+                </a:solidFill>
+              </a:rPr>
+              <a:t>StateAuthority</a:t>
+            </a:r>
+            <a:r>
+              <a:rPr lang="ja-JP" altLang="en-US" sz="2400" dirty="0"/>
+              <a:t>の場合は、</a:t>
+            </a:r>
+            <a:endParaRPr lang="en-US" altLang="ja-JP" sz="2400" dirty="0"/>
+          </a:p>
+          <a:p>
+            <a:r>
+              <a:rPr lang="ja-JP" altLang="en-US" sz="2400" dirty="0"/>
+              <a:t>以下のような流れになります。</a:t>
+            </a:r>
+            <a:endParaRPr lang="en-US" altLang="ja-JP" sz="2400" dirty="0"/>
+          </a:p>
+        </p:txBody>
+      </p:sp>
+      <p:sp>
+        <p:nvSpPr>
+          <p:cNvPr id="2" name="四角形: 角を丸くする 1">
+            <a:extLst>
+              <a:ext uri="{FF2B5EF4-FFF2-40B4-BE49-F238E27FC236}">
+                <a16:creationId xmlns:a16="http://schemas.microsoft.com/office/drawing/2014/main" id="{42A6F57A-A9B2-4028-BB6B-D56AC104F249}"/>
+              </a:ext>
+            </a:extLst>
+          </p:cNvPr>
+          <p:cNvSpPr/>
+          <p:nvPr/>
+        </p:nvSpPr>
+        <p:spPr>
+          <a:xfrm>
+            <a:off x="4965770" y="3450890"/>
+            <a:ext cx="1398494" cy="887506"/>
+          </a:xfrm>
+          <a:prstGeom prst="roundRect">
+            <a:avLst/>
+          </a:prstGeom>
+        </p:spPr>
+        <p:style>
+          <a:lnRef idx="2">
+            <a:schemeClr val="accent6">
+              <a:shade val="50000"/>
+            </a:schemeClr>
+          </a:lnRef>
+          <a:fillRef idx="1">
+            <a:schemeClr val="accent6"/>
+          </a:fillRef>
+          <a:effectRef idx="0">
+            <a:schemeClr val="accent6"/>
+          </a:effectRef>
+          <a:fontRef idx="minor">
+            <a:schemeClr val="lt1"/>
+          </a:fontRef>
+        </p:style>
+        <p:txBody>
+          <a:bodyPr rtlCol="0" anchor="ctr"/>
+          <a:lstStyle/>
+          <a:p>
+            <a:pPr algn="ctr"/>
+            <a:r>
+              <a:rPr kumimoji="1" lang="ja-JP" altLang="en-US" b="1" dirty="0"/>
+              <a:t>サーバー</a:t>
+            </a:r>
+          </a:p>
+        </p:txBody>
+      </p:sp>
+      <p:sp>
+        <p:nvSpPr>
+          <p:cNvPr id="3" name="矢印: 右 2">
+            <a:extLst>
+              <a:ext uri="{FF2B5EF4-FFF2-40B4-BE49-F238E27FC236}">
+                <a16:creationId xmlns:a16="http://schemas.microsoft.com/office/drawing/2014/main" id="{58508806-3477-4FBA-9FAE-2E6FC1750A8E}"/>
+              </a:ext>
+            </a:extLst>
+          </p:cNvPr>
+          <p:cNvSpPr/>
+          <p:nvPr/>
+        </p:nvSpPr>
+        <p:spPr>
+          <a:xfrm>
+            <a:off x="2357718" y="2779058"/>
+            <a:ext cx="2354943" cy="2185130"/>
+          </a:xfrm>
+          <a:prstGeom prst="rightArrow">
+            <a:avLst/>
+          </a:prstGeom>
+        </p:spPr>
+        <p:style>
+          <a:lnRef idx="2">
+            <a:schemeClr val="accent2">
+              <a:shade val="50000"/>
+            </a:schemeClr>
+          </a:lnRef>
+          <a:fillRef idx="1">
+            <a:schemeClr val="accent2"/>
+          </a:fillRef>
+          <a:effectRef idx="0">
+            <a:schemeClr val="accent2"/>
+          </a:effectRef>
+          <a:fontRef idx="minor">
+            <a:schemeClr val="lt1"/>
+          </a:fontRef>
+        </p:style>
+        <p:txBody>
+          <a:bodyPr rtlCol="0" anchor="ctr"/>
+          <a:lstStyle/>
+          <a:p>
+            <a:pPr algn="ctr"/>
+            <a:r>
+              <a:rPr kumimoji="1" lang="en-US" altLang="ja-JP" sz="1200" b="1" dirty="0" err="1">
+                <a:solidFill>
+                  <a:srgbClr val="0070C0"/>
+                </a:solidFill>
+              </a:rPr>
+              <a:t>RPC_AttackRequest</a:t>
+            </a:r>
+            <a:r>
+              <a:rPr kumimoji="1" lang="ja-JP" altLang="en-US" sz="1200" b="1" dirty="0"/>
+              <a:t>呼出し</a:t>
+            </a:r>
+          </a:p>
+        </p:txBody>
+      </p:sp>
+      <p:sp>
+        <p:nvSpPr>
+          <p:cNvPr id="7" name="四角形: 角を丸くする 6">
+            <a:extLst>
+              <a:ext uri="{FF2B5EF4-FFF2-40B4-BE49-F238E27FC236}">
+                <a16:creationId xmlns:a16="http://schemas.microsoft.com/office/drawing/2014/main" id="{31C287D2-8C1E-4CBC-AC29-0FBF4D4825AA}"/>
+              </a:ext>
+            </a:extLst>
+          </p:cNvPr>
+          <p:cNvSpPr/>
+          <p:nvPr/>
+        </p:nvSpPr>
+        <p:spPr>
+          <a:xfrm>
+            <a:off x="386475" y="3409065"/>
+            <a:ext cx="1810871" cy="887506"/>
+          </a:xfrm>
+          <a:prstGeom prst="roundRect">
+            <a:avLst/>
+          </a:prstGeom>
+        </p:spPr>
+        <p:style>
+          <a:lnRef idx="2">
+            <a:schemeClr val="accent1">
+              <a:shade val="50000"/>
+            </a:schemeClr>
+          </a:lnRef>
+          <a:fillRef idx="1">
+            <a:schemeClr val="accent1"/>
+          </a:fillRef>
+          <a:effectRef idx="0">
+            <a:schemeClr val="accent1"/>
+          </a:effectRef>
+          <a:fontRef idx="minor">
+            <a:schemeClr val="lt1"/>
+          </a:fontRef>
+        </p:style>
+        <p:txBody>
+          <a:bodyPr rtlCol="0" anchor="ctr"/>
+          <a:lstStyle/>
+          <a:p>
+            <a:pPr algn="ctr"/>
+            <a:r>
+              <a:rPr kumimoji="1" lang="ja-JP" altLang="en-US" b="1" dirty="0"/>
+              <a:t>クライアント</a:t>
+            </a:r>
+            <a:r>
+              <a:rPr kumimoji="1" lang="en-US" altLang="ja-JP" b="1" dirty="0"/>
+              <a:t>A</a:t>
+            </a:r>
+            <a:endParaRPr kumimoji="1" lang="ja-JP" altLang="en-US" b="1" dirty="0"/>
+          </a:p>
+        </p:txBody>
+      </p:sp>
+      <p:sp>
+        <p:nvSpPr>
+          <p:cNvPr id="14" name="テキスト ボックス 13">
+            <a:extLst>
+              <a:ext uri="{FF2B5EF4-FFF2-40B4-BE49-F238E27FC236}">
+                <a16:creationId xmlns:a16="http://schemas.microsoft.com/office/drawing/2014/main" id="{5FB4CD2B-51C9-4C6B-9D24-1E319000AC06}"/>
+              </a:ext>
+            </a:extLst>
+          </p:cNvPr>
+          <p:cNvSpPr txBox="1"/>
+          <p:nvPr/>
+        </p:nvSpPr>
+        <p:spPr>
+          <a:xfrm>
+            <a:off x="381608" y="5242711"/>
+            <a:ext cx="9110186" cy="830997"/>
+          </a:xfrm>
+          <a:prstGeom prst="rect">
+            <a:avLst/>
+          </a:prstGeom>
+          <a:noFill/>
+        </p:spPr>
+        <p:txBody>
+          <a:bodyPr wrap="none" rtlCol="0">
+            <a:spAutoFit/>
+          </a:bodyPr>
+          <a:lstStyle/>
+          <a:p>
+            <a:r>
+              <a:rPr lang="ja-JP" altLang="en-US" sz="2400" dirty="0"/>
+              <a:t>クライアントの入力から他者にも反映させたい時に使います。</a:t>
+            </a:r>
+            <a:endParaRPr lang="en-US" altLang="ja-JP" sz="2400" dirty="0"/>
+          </a:p>
+          <a:p>
+            <a:r>
+              <a:rPr lang="ja-JP" altLang="en-US" sz="2400" dirty="0"/>
+              <a:t>例：</a:t>
+            </a:r>
+            <a:r>
+              <a:rPr lang="en-US" altLang="ja-JP" sz="2400" dirty="0"/>
+              <a:t>RPG</a:t>
+            </a:r>
+            <a:r>
+              <a:rPr lang="ja-JP" altLang="en-US" sz="2400" dirty="0"/>
+              <a:t>のレイドバトルなど</a:t>
+            </a:r>
+            <a:endParaRPr lang="en-US" altLang="ja-JP" sz="2400" dirty="0"/>
+          </a:p>
+        </p:txBody>
+      </p:sp>
+      <p:sp>
+        <p:nvSpPr>
+          <p:cNvPr id="15" name="テキスト ボックス 14">
+            <a:extLst>
+              <a:ext uri="{FF2B5EF4-FFF2-40B4-BE49-F238E27FC236}">
+                <a16:creationId xmlns:a16="http://schemas.microsoft.com/office/drawing/2014/main" id="{EADC94AF-FF68-454A-B5E4-D679C66497C5}"/>
+              </a:ext>
+            </a:extLst>
+          </p:cNvPr>
+          <p:cNvSpPr txBox="1"/>
+          <p:nvPr/>
+        </p:nvSpPr>
+        <p:spPr>
+          <a:xfrm>
+            <a:off x="6502176" y="3640790"/>
+            <a:ext cx="3810659" cy="461665"/>
+          </a:xfrm>
+          <a:prstGeom prst="rect">
+            <a:avLst/>
+          </a:prstGeom>
+          <a:noFill/>
+        </p:spPr>
+        <p:txBody>
+          <a:bodyPr wrap="none" rtlCol="0">
+            <a:spAutoFit/>
+          </a:bodyPr>
+          <a:lstStyle/>
+          <a:p>
+            <a:r>
+              <a:rPr lang="en-US" altLang="ja-JP" sz="2400" b="1" dirty="0" err="1">
+                <a:solidFill>
+                  <a:srgbClr val="0070C0"/>
+                </a:solidFill>
+              </a:rPr>
+              <a:t>RPC_AttackRequest</a:t>
+            </a:r>
+            <a:r>
+              <a:rPr lang="ja-JP" altLang="en-US" sz="2400" dirty="0"/>
+              <a:t>実行</a:t>
+            </a:r>
+            <a:endParaRPr lang="en-US" altLang="ja-JP" sz="2400" dirty="0"/>
+          </a:p>
+        </p:txBody>
+      </p:sp>
+    </p:spTree>
+    <p:extLst>
+      <p:ext uri="{BB962C8B-B14F-4D97-AF65-F5344CB8AC3E}">
+        <p14:creationId xmlns:p14="http://schemas.microsoft.com/office/powerpoint/2010/main" val="30676352"/>
+      </p:ext>
+    </p:extLst>
+  </p:cSld>
+  <p:clrMapOvr>
+    <a:masterClrMapping/>
+  </p:clrMapOvr>
+</p:sld>
+</file>
+
+<file path=ppt/slides/slide13.xml><?xml version="1.0" encoding="utf-8"?>
+<p:sld xmlns:a="http://schemas.openxmlformats.org/drawingml/2006/main" xmlns:r="http://schemas.openxmlformats.org/officeDocument/2006/relationships" xmlns:p="http://schemas.openxmlformats.org/presentationml/2006/main">
+  <p:cSld>
+    <p:spTree>
+      <p:nvGrpSpPr>
+        <p:cNvPr id="1" name=""/>
+        <p:cNvGrpSpPr/>
+        <p:nvPr/>
+      </p:nvGrpSpPr>
+      <p:grpSpPr>
+        <a:xfrm>
+          <a:off x="0" y="0"/>
+          <a:ext cx="0" cy="0"/>
+          <a:chOff x="0" y="0"/>
+          <a:chExt cx="0" cy="0"/>
+        </a:xfrm>
+      </p:grpSpPr>
+      <p:sp>
+        <p:nvSpPr>
+          <p:cNvPr id="4" name="テキスト ボックス 3">
+            <a:extLst>
+              <a:ext uri="{FF2B5EF4-FFF2-40B4-BE49-F238E27FC236}">
+                <a16:creationId xmlns:a16="http://schemas.microsoft.com/office/drawing/2014/main" id="{5A13BF46-B8C5-48AA-8308-C9ECFF431A18}"/>
+              </a:ext>
+            </a:extLst>
+          </p:cNvPr>
+          <p:cNvSpPr txBox="1"/>
+          <p:nvPr/>
+        </p:nvSpPr>
+        <p:spPr>
+          <a:xfrm>
+            <a:off x="567542" y="491954"/>
+            <a:ext cx="3584636" cy="584775"/>
+          </a:xfrm>
+          <a:prstGeom prst="rect">
+            <a:avLst/>
+          </a:prstGeom>
+          <a:noFill/>
+        </p:spPr>
+        <p:txBody>
+          <a:bodyPr wrap="none" rtlCol="0">
+            <a:spAutoFit/>
+          </a:bodyPr>
+          <a:lstStyle/>
+          <a:p>
+            <a:r>
+              <a:rPr kumimoji="1" lang="ja-JP" altLang="en-US" sz="3200" b="1" u="sng" dirty="0"/>
+              <a:t>イベント同期 </a:t>
+            </a:r>
+            <a:r>
+              <a:rPr lang="ja-JP" altLang="en-US" sz="3200" b="1" u="sng" dirty="0"/>
+              <a:t>補足</a:t>
+            </a:r>
+            <a:endParaRPr kumimoji="1" lang="ja-JP" altLang="en-US" sz="3200" b="1" u="sng" dirty="0"/>
+          </a:p>
+        </p:txBody>
+      </p:sp>
+      <p:sp>
+        <p:nvSpPr>
+          <p:cNvPr id="6" name="テキスト ボックス 5">
+            <a:extLst>
+              <a:ext uri="{FF2B5EF4-FFF2-40B4-BE49-F238E27FC236}">
+                <a16:creationId xmlns:a16="http://schemas.microsoft.com/office/drawing/2014/main" id="{55830AD6-028B-4C4E-80BF-B70DFC1C3A46}"/>
+              </a:ext>
+            </a:extLst>
+          </p:cNvPr>
+          <p:cNvSpPr txBox="1"/>
+          <p:nvPr/>
+        </p:nvSpPr>
+        <p:spPr>
+          <a:xfrm>
+            <a:off x="567542" y="1216429"/>
+            <a:ext cx="10344499" cy="1200329"/>
+          </a:xfrm>
+          <a:prstGeom prst="rect">
+            <a:avLst/>
+          </a:prstGeom>
+          <a:noFill/>
+        </p:spPr>
+        <p:txBody>
+          <a:bodyPr wrap="none" rtlCol="0">
+            <a:spAutoFit/>
+          </a:bodyPr>
+          <a:lstStyle/>
+          <a:p>
+            <a:r>
+              <a:rPr lang="en-US" altLang="ja-JP" sz="2400" dirty="0"/>
+              <a:t>RPC</a:t>
+            </a:r>
+            <a:r>
+              <a:rPr lang="ja-JP" altLang="en-US" sz="2400" dirty="0"/>
+              <a:t>関数はネットワーク経由で他の端末に関数を実行させる仕組みです。</a:t>
+            </a:r>
+            <a:endParaRPr lang="en-US" altLang="ja-JP" sz="2400" dirty="0"/>
+          </a:p>
+          <a:p>
+            <a:r>
+              <a:rPr lang="ja-JP" altLang="en-US" sz="2400" dirty="0"/>
+              <a:t>よって、</a:t>
+            </a:r>
+            <a:r>
+              <a:rPr lang="ja-JP" altLang="en-US" sz="2400" b="1" dirty="0">
+                <a:solidFill>
+                  <a:srgbClr val="FF0000"/>
+                </a:solidFill>
+              </a:rPr>
+              <a:t>通信環境などで実行が遅れる端末も発生</a:t>
+            </a:r>
+            <a:r>
+              <a:rPr lang="ja-JP" altLang="en-US" sz="2400" dirty="0"/>
+              <a:t>します。</a:t>
+            </a:r>
+            <a:endParaRPr lang="en-US" altLang="ja-JP" sz="2400" dirty="0"/>
+          </a:p>
+          <a:p>
+            <a:r>
+              <a:rPr lang="ja-JP" altLang="en-US" sz="2400" dirty="0"/>
+              <a:t>タイミングがずれてもゲームに影響が出ないものだけに使用しましょう。</a:t>
+            </a:r>
+            <a:endParaRPr lang="en-US" altLang="ja-JP" sz="2400" dirty="0"/>
+          </a:p>
+        </p:txBody>
+      </p:sp>
+      <p:sp>
+        <p:nvSpPr>
+          <p:cNvPr id="9" name="四角形: 角を丸くする 8">
+            <a:extLst>
+              <a:ext uri="{FF2B5EF4-FFF2-40B4-BE49-F238E27FC236}">
+                <a16:creationId xmlns:a16="http://schemas.microsoft.com/office/drawing/2014/main" id="{EF25CD80-2A3F-4A51-A317-01C38FE2D519}"/>
+              </a:ext>
+            </a:extLst>
+          </p:cNvPr>
+          <p:cNvSpPr/>
+          <p:nvPr/>
+        </p:nvSpPr>
+        <p:spPr>
+          <a:xfrm>
+            <a:off x="797859" y="4072200"/>
+            <a:ext cx="1398494" cy="887506"/>
+          </a:xfrm>
+          <a:prstGeom prst="roundRect">
+            <a:avLst/>
+          </a:prstGeom>
+        </p:spPr>
+        <p:style>
+          <a:lnRef idx="2">
+            <a:schemeClr val="accent6">
+              <a:shade val="50000"/>
+            </a:schemeClr>
+          </a:lnRef>
+          <a:fillRef idx="1">
+            <a:schemeClr val="accent6"/>
+          </a:fillRef>
+          <a:effectRef idx="0">
+            <a:schemeClr val="accent6"/>
+          </a:effectRef>
+          <a:fontRef idx="minor">
+            <a:schemeClr val="lt1"/>
+          </a:fontRef>
+        </p:style>
+        <p:txBody>
+          <a:bodyPr rtlCol="0" anchor="ctr"/>
+          <a:lstStyle/>
+          <a:p>
+            <a:pPr algn="ctr"/>
+            <a:r>
+              <a:rPr kumimoji="1" lang="ja-JP" altLang="en-US" b="1" dirty="0"/>
+              <a:t>サーバー</a:t>
+            </a:r>
+          </a:p>
+        </p:txBody>
+      </p:sp>
+      <p:sp>
+        <p:nvSpPr>
+          <p:cNvPr id="10" name="矢印: 右 9">
+            <a:extLst>
+              <a:ext uri="{FF2B5EF4-FFF2-40B4-BE49-F238E27FC236}">
+                <a16:creationId xmlns:a16="http://schemas.microsoft.com/office/drawing/2014/main" id="{B60A36CA-A535-4181-822B-A5BA64D72445}"/>
+              </a:ext>
+            </a:extLst>
+          </p:cNvPr>
+          <p:cNvSpPr/>
+          <p:nvPr/>
+        </p:nvSpPr>
+        <p:spPr>
+          <a:xfrm>
+            <a:off x="2447365" y="3424516"/>
+            <a:ext cx="2354943" cy="2185130"/>
+          </a:xfrm>
+          <a:prstGeom prst="rightArrow">
+            <a:avLst/>
+          </a:prstGeom>
+        </p:spPr>
+        <p:style>
+          <a:lnRef idx="2">
+            <a:schemeClr val="accent2">
+              <a:shade val="50000"/>
+            </a:schemeClr>
+          </a:lnRef>
+          <a:fillRef idx="1">
+            <a:schemeClr val="accent2"/>
+          </a:fillRef>
+          <a:effectRef idx="0">
+            <a:schemeClr val="accent2"/>
+          </a:effectRef>
+          <a:fontRef idx="minor">
+            <a:schemeClr val="lt1"/>
+          </a:fontRef>
+        </p:style>
+        <p:txBody>
+          <a:bodyPr rtlCol="0" anchor="ctr"/>
+          <a:lstStyle/>
+          <a:p>
+            <a:pPr algn="ctr"/>
+            <a:r>
+              <a:rPr kumimoji="1" lang="en-US" altLang="ja-JP" sz="1200" b="1" dirty="0" err="1">
+                <a:solidFill>
+                  <a:srgbClr val="0070C0"/>
+                </a:solidFill>
+              </a:rPr>
+              <a:t>RPC_PlayEffect</a:t>
+            </a:r>
+            <a:r>
+              <a:rPr kumimoji="1" lang="ja-JP" altLang="en-US" sz="1200" b="1" dirty="0"/>
+              <a:t>呼出し</a:t>
+            </a:r>
+          </a:p>
+        </p:txBody>
+      </p:sp>
+      <p:sp>
+        <p:nvSpPr>
+          <p:cNvPr id="11" name="四角形: 角を丸くする 10">
+            <a:extLst>
+              <a:ext uri="{FF2B5EF4-FFF2-40B4-BE49-F238E27FC236}">
+                <a16:creationId xmlns:a16="http://schemas.microsoft.com/office/drawing/2014/main" id="{65713B5A-8D02-4AA2-9E79-4DE49B9F9251}"/>
+              </a:ext>
+            </a:extLst>
+          </p:cNvPr>
+          <p:cNvSpPr/>
+          <p:nvPr/>
+        </p:nvSpPr>
+        <p:spPr>
+          <a:xfrm>
+            <a:off x="4921619" y="2980764"/>
+            <a:ext cx="1810871" cy="887506"/>
+          </a:xfrm>
+          <a:prstGeom prst="roundRect">
+            <a:avLst/>
+          </a:prstGeom>
+        </p:spPr>
+        <p:style>
+          <a:lnRef idx="2">
+            <a:schemeClr val="accent1">
+              <a:shade val="50000"/>
+            </a:schemeClr>
+          </a:lnRef>
+          <a:fillRef idx="1">
+            <a:schemeClr val="accent1"/>
+          </a:fillRef>
+          <a:effectRef idx="0">
+            <a:schemeClr val="accent1"/>
+          </a:effectRef>
+          <a:fontRef idx="minor">
+            <a:schemeClr val="lt1"/>
+          </a:fontRef>
+        </p:style>
+        <p:txBody>
+          <a:bodyPr rtlCol="0" anchor="ctr"/>
+          <a:lstStyle/>
+          <a:p>
+            <a:pPr algn="ctr"/>
+            <a:r>
+              <a:rPr kumimoji="1" lang="ja-JP" altLang="en-US" b="1" dirty="0"/>
+              <a:t>クライアント</a:t>
+            </a:r>
+            <a:r>
+              <a:rPr kumimoji="1" lang="en-US" altLang="ja-JP" b="1" dirty="0"/>
+              <a:t>A</a:t>
+            </a:r>
+          </a:p>
+          <a:p>
+            <a:pPr algn="ctr"/>
+            <a:r>
+              <a:rPr lang="ja-JP" altLang="en-US" b="1" dirty="0"/>
+              <a:t>回線 最高</a:t>
+            </a:r>
+            <a:endParaRPr kumimoji="1" lang="ja-JP" altLang="en-US" b="1" dirty="0"/>
+          </a:p>
+        </p:txBody>
+      </p:sp>
+      <p:sp>
+        <p:nvSpPr>
+          <p:cNvPr id="12" name="四角形: 角を丸くする 11">
+            <a:extLst>
+              <a:ext uri="{FF2B5EF4-FFF2-40B4-BE49-F238E27FC236}">
+                <a16:creationId xmlns:a16="http://schemas.microsoft.com/office/drawing/2014/main" id="{A9DF1175-4744-431D-97B9-6D7119B940D1}"/>
+              </a:ext>
+            </a:extLst>
+          </p:cNvPr>
+          <p:cNvSpPr/>
+          <p:nvPr/>
+        </p:nvSpPr>
+        <p:spPr>
+          <a:xfrm>
+            <a:off x="4921618" y="4072200"/>
+            <a:ext cx="1810871" cy="887506"/>
+          </a:xfrm>
+          <a:prstGeom prst="roundRect">
+            <a:avLst/>
+          </a:prstGeom>
+        </p:spPr>
+        <p:style>
+          <a:lnRef idx="2">
+            <a:schemeClr val="accent1">
+              <a:shade val="50000"/>
+            </a:schemeClr>
+          </a:lnRef>
+          <a:fillRef idx="1">
+            <a:schemeClr val="accent1"/>
+          </a:fillRef>
+          <a:effectRef idx="0">
+            <a:schemeClr val="accent1"/>
+          </a:effectRef>
+          <a:fontRef idx="minor">
+            <a:schemeClr val="lt1"/>
+          </a:fontRef>
+        </p:style>
+        <p:txBody>
+          <a:bodyPr rtlCol="0" anchor="ctr"/>
+          <a:lstStyle/>
+          <a:p>
+            <a:pPr algn="ctr"/>
+            <a:r>
+              <a:rPr kumimoji="1" lang="ja-JP" altLang="en-US" b="1" dirty="0"/>
+              <a:t>クライアント</a:t>
+            </a:r>
+            <a:r>
+              <a:rPr kumimoji="1" lang="en-US" altLang="ja-JP" b="1" dirty="0"/>
+              <a:t>B</a:t>
+            </a:r>
+          </a:p>
+          <a:p>
+            <a:pPr algn="ctr"/>
+            <a:r>
+              <a:rPr lang="ja-JP" altLang="en-US" b="1" dirty="0"/>
+              <a:t>回線 普通</a:t>
+            </a:r>
+            <a:endParaRPr kumimoji="1" lang="ja-JP" altLang="en-US" b="1" dirty="0"/>
+          </a:p>
+        </p:txBody>
+      </p:sp>
+      <p:sp>
+        <p:nvSpPr>
+          <p:cNvPr id="13" name="テキスト ボックス 12">
+            <a:extLst>
+              <a:ext uri="{FF2B5EF4-FFF2-40B4-BE49-F238E27FC236}">
+                <a16:creationId xmlns:a16="http://schemas.microsoft.com/office/drawing/2014/main" id="{719258B2-B697-413F-96CE-D1BD12CC0EC8}"/>
+              </a:ext>
+            </a:extLst>
+          </p:cNvPr>
+          <p:cNvSpPr txBox="1"/>
+          <p:nvPr/>
+        </p:nvSpPr>
+        <p:spPr>
+          <a:xfrm>
+            <a:off x="7649609" y="4148862"/>
+            <a:ext cx="3262432" cy="830997"/>
+          </a:xfrm>
+          <a:prstGeom prst="rect">
+            <a:avLst/>
+          </a:prstGeom>
+          <a:noFill/>
+        </p:spPr>
+        <p:txBody>
+          <a:bodyPr wrap="none" rtlCol="0">
+            <a:spAutoFit/>
+          </a:bodyPr>
+          <a:lstStyle/>
+          <a:p>
+            <a:r>
+              <a:rPr lang="ja-JP" altLang="en-US" sz="2400" dirty="0"/>
+              <a:t>それぞれで</a:t>
+            </a:r>
+            <a:endParaRPr lang="en-US" altLang="ja-JP" sz="2400" dirty="0"/>
+          </a:p>
+          <a:p>
+            <a:r>
+              <a:rPr lang="ja-JP" altLang="en-US" sz="2400" dirty="0"/>
+              <a:t>実行タイミングは違う</a:t>
+            </a:r>
+            <a:endParaRPr lang="en-US" altLang="ja-JP" sz="2400" dirty="0"/>
+          </a:p>
+        </p:txBody>
+      </p:sp>
+      <p:sp>
+        <p:nvSpPr>
+          <p:cNvPr id="17" name="四角形: 角を丸くする 16">
+            <a:extLst>
+              <a:ext uri="{FF2B5EF4-FFF2-40B4-BE49-F238E27FC236}">
+                <a16:creationId xmlns:a16="http://schemas.microsoft.com/office/drawing/2014/main" id="{5B603F21-F1E7-448A-AA51-844C275F0799}"/>
+              </a:ext>
+            </a:extLst>
+          </p:cNvPr>
+          <p:cNvSpPr/>
+          <p:nvPr/>
+        </p:nvSpPr>
+        <p:spPr>
+          <a:xfrm>
+            <a:off x="4921619" y="5289176"/>
+            <a:ext cx="1810871" cy="887506"/>
+          </a:xfrm>
+          <a:prstGeom prst="roundRect">
+            <a:avLst/>
+          </a:prstGeom>
+        </p:spPr>
+        <p:style>
+          <a:lnRef idx="2">
+            <a:schemeClr val="accent1">
+              <a:shade val="50000"/>
+            </a:schemeClr>
+          </a:lnRef>
+          <a:fillRef idx="1">
+            <a:schemeClr val="accent1"/>
+          </a:fillRef>
+          <a:effectRef idx="0">
+            <a:schemeClr val="accent1"/>
+          </a:effectRef>
+          <a:fontRef idx="minor">
+            <a:schemeClr val="lt1"/>
+          </a:fontRef>
+        </p:style>
+        <p:txBody>
+          <a:bodyPr rtlCol="0" anchor="ctr"/>
+          <a:lstStyle/>
+          <a:p>
+            <a:pPr algn="ctr"/>
+            <a:r>
+              <a:rPr kumimoji="1" lang="ja-JP" altLang="en-US" b="1" dirty="0"/>
+              <a:t>クライアント</a:t>
+            </a:r>
+            <a:r>
+              <a:rPr kumimoji="1" lang="en-US" altLang="ja-JP" b="1" dirty="0"/>
+              <a:t>C</a:t>
+            </a:r>
+          </a:p>
+          <a:p>
+            <a:pPr algn="ctr"/>
+            <a:r>
+              <a:rPr lang="ja-JP" altLang="en-US" b="1" dirty="0"/>
+              <a:t>回線 悪い</a:t>
+            </a:r>
+            <a:endParaRPr kumimoji="1" lang="ja-JP" altLang="en-US" b="1" dirty="0"/>
+          </a:p>
+        </p:txBody>
+      </p:sp>
+    </p:spTree>
+    <p:extLst>
+      <p:ext uri="{BB962C8B-B14F-4D97-AF65-F5344CB8AC3E}">
+        <p14:creationId xmlns:p14="http://schemas.microsoft.com/office/powerpoint/2010/main" val="900779409"/>
       </p:ext>
     </p:extLst>
   </p:cSld>
@@ -4895,7 +6435,7 @@
         <p:spPr>
           <a:xfrm>
             <a:off x="567542" y="1216429"/>
-            <a:ext cx="8125942" cy="461665"/>
+            <a:ext cx="8129148" cy="461665"/>
           </a:xfrm>
           <a:prstGeom prst="rect">
             <a:avLst/>
@@ -4918,7 +6458,15 @@
             </a:r>
             <a:r>
               <a:rPr lang="ja-JP" altLang="en-US" sz="2400" dirty="0"/>
-              <a:t>とは、この関数を呼び出し権限になります。</a:t>
+              <a:t>とは、</a:t>
+            </a:r>
+            <a:r>
+              <a:rPr lang="en-US" altLang="ja-JP" sz="2400" dirty="0"/>
+              <a:t>RPC</a:t>
+            </a:r>
+            <a:r>
+              <a:rPr lang="ja-JP" altLang="en-US" sz="2400" dirty="0"/>
+              <a:t>関数の呼び出し権限になります。</a:t>
             </a:r>
             <a:endParaRPr lang="en-US" altLang="ja-JP" sz="2400" dirty="0"/>
           </a:p>
